--- a/Customer-Behavior-Analysis.pptx
+++ b/Customer-Behavior-Analysis.pptx
@@ -4,6 +4,9 @@
   <p:sldMasterIdLst>
     <p:sldMasterId id="2147483648" r:id="rId1"/>
   </p:sldMasterIdLst>
+  <p:notesMasterIdLst>
+    <p:notesMasterId r:id="rId12"/>
+  </p:notesMasterIdLst>
   <p:sldIdLst>
     <p:sldId id="256" r:id="rId2"/>
     <p:sldId id="257" r:id="rId3"/>
@@ -16,45 +19,121 @@
     <p:sldId id="264" r:id="rId10"/>
     <p:sldId id="265" r:id="rId11"/>
   </p:sldIdLst>
-  <p:notesMasterIdLst>
-    <p:notesMasterId r:id="rId12"/>
-  </p:notesMasterIdLst>
-  <p:sldSz cx="9144000" cy="5143500"/>
+  <p:sldSz cx="9144000" cy="5143500" type="screen16x9"/>
   <p:notesSz cx="5143500" cy="9144000"/>
   <p:embeddedFontLst>
     <p:embeddedFont>
-      <p:font typeface="Petrona"/>
+      <p:font typeface="Consolas" panose="020B0609020204030204" pitchFamily="49" charset="0"/>
+      <p:regular r:id="rId13"/>
+      <p:bold r:id="rId14"/>
+      <p:italic r:id="rId15"/>
+      <p:boldItalic r:id="rId16"/>
+    </p:embeddedFont>
+    <p:embeddedFont>
+      <p:font typeface="Inter" panose="020B0604020202020204" charset="0"/>
       <p:regular r:id="rId17"/>
     </p:embeddedFont>
-    <p:embeddedFont>
-      <p:font typeface="Petrona"/>
-      <p:regular r:id="rId18"/>
-    </p:embeddedFont>
-    <p:embeddedFont>
-      <p:font typeface="Petrona"/>
-      <p:regular r:id="rId19"/>
-    </p:embeddedFont>
-    <p:embeddedFont>
-      <p:font typeface="Petrona"/>
-      <p:regular r:id="rId20"/>
-    </p:embeddedFont>
-    <p:embeddedFont>
-      <p:font typeface="Inter"/>
-      <p:regular r:id="rId21"/>
-    </p:embeddedFont>
-    <p:embeddedFont>
-      <p:font typeface="Inter"/>
-      <p:regular r:id="rId22"/>
-    </p:embeddedFont>
-    <p:embeddedFont>
-      <p:font typeface="Inter"/>
-      <p:regular r:id="rId23"/>
-    </p:embeddedFont>
-    <p:embeddedFont>
-      <p:font typeface="Inter"/>
-      <p:regular r:id="rId24"/>
-    </p:embeddedFont>
   </p:embeddedFontLst>
+  <p:defaultTextStyle>
+    <a:defPPr>
+      <a:defRPr lang="en-US"/>
+    </a:defPPr>
+    <a:lvl1pPr marL="0" algn="l" defTabSz="914400" rtl="0" eaLnBrk="1" latinLnBrk="0" hangingPunct="1">
+      <a:defRPr sz="1800" kern="1200">
+        <a:solidFill>
+          <a:schemeClr val="tx1"/>
+        </a:solidFill>
+        <a:latin typeface="+mn-lt"/>
+        <a:ea typeface="+mn-ea"/>
+        <a:cs typeface="+mn-cs"/>
+      </a:defRPr>
+    </a:lvl1pPr>
+    <a:lvl2pPr marL="457200" algn="l" defTabSz="914400" rtl="0" eaLnBrk="1" latinLnBrk="0" hangingPunct="1">
+      <a:defRPr sz="1800" kern="1200">
+        <a:solidFill>
+          <a:schemeClr val="tx1"/>
+        </a:solidFill>
+        <a:latin typeface="+mn-lt"/>
+        <a:ea typeface="+mn-ea"/>
+        <a:cs typeface="+mn-cs"/>
+      </a:defRPr>
+    </a:lvl2pPr>
+    <a:lvl3pPr marL="914400" algn="l" defTabSz="914400" rtl="0" eaLnBrk="1" latinLnBrk="0" hangingPunct="1">
+      <a:defRPr sz="1800" kern="1200">
+        <a:solidFill>
+          <a:schemeClr val="tx1"/>
+        </a:solidFill>
+        <a:latin typeface="+mn-lt"/>
+        <a:ea typeface="+mn-ea"/>
+        <a:cs typeface="+mn-cs"/>
+      </a:defRPr>
+    </a:lvl3pPr>
+    <a:lvl4pPr marL="1371600" algn="l" defTabSz="914400" rtl="0" eaLnBrk="1" latinLnBrk="0" hangingPunct="1">
+      <a:defRPr sz="1800" kern="1200">
+        <a:solidFill>
+          <a:schemeClr val="tx1"/>
+        </a:solidFill>
+        <a:latin typeface="+mn-lt"/>
+        <a:ea typeface="+mn-ea"/>
+        <a:cs typeface="+mn-cs"/>
+      </a:defRPr>
+    </a:lvl4pPr>
+    <a:lvl5pPr marL="1828800" algn="l" defTabSz="914400" rtl="0" eaLnBrk="1" latinLnBrk="0" hangingPunct="1">
+      <a:defRPr sz="1800" kern="1200">
+        <a:solidFill>
+          <a:schemeClr val="tx1"/>
+        </a:solidFill>
+        <a:latin typeface="+mn-lt"/>
+        <a:ea typeface="+mn-ea"/>
+        <a:cs typeface="+mn-cs"/>
+      </a:defRPr>
+    </a:lvl5pPr>
+    <a:lvl6pPr marL="2286000" algn="l" defTabSz="914400" rtl="0" eaLnBrk="1" latinLnBrk="0" hangingPunct="1">
+      <a:defRPr sz="1800" kern="1200">
+        <a:solidFill>
+          <a:schemeClr val="tx1"/>
+        </a:solidFill>
+        <a:latin typeface="+mn-lt"/>
+        <a:ea typeface="+mn-ea"/>
+        <a:cs typeface="+mn-cs"/>
+      </a:defRPr>
+    </a:lvl6pPr>
+    <a:lvl7pPr marL="2743200" algn="l" defTabSz="914400" rtl="0" eaLnBrk="1" latinLnBrk="0" hangingPunct="1">
+      <a:defRPr sz="1800" kern="1200">
+        <a:solidFill>
+          <a:schemeClr val="tx1"/>
+        </a:solidFill>
+        <a:latin typeface="+mn-lt"/>
+        <a:ea typeface="+mn-ea"/>
+        <a:cs typeface="+mn-cs"/>
+      </a:defRPr>
+    </a:lvl7pPr>
+    <a:lvl8pPr marL="3200400" algn="l" defTabSz="914400" rtl="0" eaLnBrk="1" latinLnBrk="0" hangingPunct="1">
+      <a:defRPr sz="1800" kern="1200">
+        <a:solidFill>
+          <a:schemeClr val="tx1"/>
+        </a:solidFill>
+        <a:latin typeface="+mn-lt"/>
+        <a:ea typeface="+mn-ea"/>
+        <a:cs typeface="+mn-cs"/>
+      </a:defRPr>
+    </a:lvl8pPr>
+    <a:lvl9pPr marL="3657600" algn="l" defTabSz="914400" rtl="0" eaLnBrk="1" latinLnBrk="0" hangingPunct="1">
+      <a:defRPr sz="1800" kern="1200">
+        <a:solidFill>
+          <a:schemeClr val="tx1"/>
+        </a:solidFill>
+        <a:latin typeface="+mn-lt"/>
+        <a:ea typeface="+mn-ea"/>
+        <a:cs typeface="+mn-cs"/>
+      </a:defRPr>
+    </a:lvl9pPr>
+  </p:defaultTextStyle>
+  <p:extLst>
+    <p:ext uri="{EFAFB233-063F-42B5-8137-9DF3F51BA10A}">
+      <p15:sldGuideLst xmlns:p15="http://schemas.microsoft.com/office/powerpoint/2012/main"/>
+    </p:ext>
+  </p:extLst>
 </p:presentation>
 </file>
 
@@ -80,234 +159,10 @@
           <a:chExt cx="0" cy="0"/>
         </a:xfrm>
       </p:grpSpPr>
-      <p:sp>
-        <p:nvSpPr>
-          <p:cNvPr id="2" name="Header Placeholder 1"/>
-          <p:cNvSpPr>
-            <a:spLocks noGrp="1"/>
-          </p:cNvSpPr>
-          <p:nvPr>
-            <p:ph type="hdr" sz="quarter"/>
-          </p:nvPr>
-        </p:nvSpPr>
-        <p:spPr>
-          <a:xfrm>
-            <a:off x="0" y="0"/>
-            <a:ext cx="2971800" cy="458788"/>
-          </a:xfrm>
-          <a:prstGeom prst="rect">
-            <a:avLst/>
-          </a:prstGeom>
-        </p:spPr>
-        <p:txBody>
-          <a:bodyPr vert="horz" lIns="91440" tIns="45720" rIns="91440" bIns="45720" rtlCol="0"/>
-          <a:lstStyle>
-            <a:lvl1pPr algn="l">
-              <a:defRPr sz="1200"/>
-            </a:lvl1pPr>
-          </a:lstStyle>
-          <a:p>
-            <a:endParaRPr lang="en-US"/>
-          </a:p>
-        </p:txBody>
-      </p:sp>
-      <p:sp>
-        <p:nvSpPr>
-          <p:cNvPr id="3" name="Date Placeholder 2"/>
-          <p:cNvSpPr>
-            <a:spLocks noGrp="1"/>
-          </p:cNvSpPr>
-          <p:nvPr>
-            <p:ph type="dt" idx="1"/>
-          </p:nvPr>
-        </p:nvSpPr>
-        <p:spPr>
-          <a:xfrm>
-            <a:off x="3884613" y="0"/>
-            <a:ext cx="2971800" cy="458788"/>
-          </a:xfrm>
-          <a:prstGeom prst="rect">
-            <a:avLst/>
-          </a:prstGeom>
-        </p:spPr>
-        <p:txBody>
-          <a:bodyPr vert="horz" lIns="91440" tIns="45720" rIns="91440" bIns="45720" rtlCol="0"/>
-          <a:lstStyle>
-            <a:lvl1pPr algn="r">
-              <a:defRPr sz="1200"/>
-            </a:lvl1pPr>
-          </a:lstStyle>
-          <a:p>
-            <a:fld id="{5282F153-3F37-0F45-9E97-73ACFA13230C}" type="datetimeFigureOut">
-              <a:rPr lang="en-US"/>
-              <a:t>7/23/19</a:t>
-            </a:fld>
-            <a:endParaRPr lang="en-US"/>
-          </a:p>
-        </p:txBody>
-      </p:sp>
-      <p:sp>
-        <p:nvSpPr>
-          <p:cNvPr id="4" name="Slide Image Placeholder 3"/>
-          <p:cNvSpPr>
-            <a:spLocks noGrp="1" noRot="1" noChangeAspect="1"/>
-          </p:cNvSpPr>
-          <p:nvPr>
-            <p:ph type="sldImg" idx="2"/>
-          </p:nvPr>
-        </p:nvSpPr>
-        <p:spPr>
-          <a:xfrm>
-            <a:off x="685800" y="1143000"/>
-            <a:ext cx="5486400" cy="3086100"/>
-          </a:xfrm>
-          <a:prstGeom prst="rect">
-            <a:avLst/>
-          </a:prstGeom>
-          <a:noFill/>
-          <a:ln w="12700">
-            <a:solidFill>
-              <a:prstClr val="black"/>
-            </a:solidFill>
-          </a:ln>
-        </p:spPr>
-        <p:txBody>
-          <a:bodyPr vert="horz" lIns="91440" tIns="45720" rIns="91440" bIns="45720" rtlCol="0" anchor="ctr"/>
-          <a:lstStyle/>
-          <a:p>
-            <a:endParaRPr lang="en-US"/>
-          </a:p>
-        </p:txBody>
-      </p:sp>
-      <p:sp>
-        <p:nvSpPr>
-          <p:cNvPr id="5" name="Notes Placeholder 4"/>
-          <p:cNvSpPr>
-            <a:spLocks noGrp="1"/>
-          </p:cNvSpPr>
-          <p:nvPr>
-            <p:ph type="body" sz="quarter" idx="3"/>
-          </p:nvPr>
-        </p:nvSpPr>
-        <p:spPr>
-          <a:xfrm>
-            <a:off x="685800" y="4400550"/>
-            <a:ext cx="5486400" cy="3600450"/>
-          </a:xfrm>
-          <a:prstGeom prst="rect">
-            <a:avLst/>
-          </a:prstGeom>
-        </p:spPr>
-        <p:txBody>
-          <a:bodyPr vert="horz" lIns="91440" tIns="45720" rIns="91440" bIns="45720" rtlCol="0"/>
-          <a:lstStyle/>
-          <a:p>
-            <a:pPr lvl="0"/>
-            <a:r>
-              <a:rPr lang="en-US"/>
-              <a:t>Click to edit Master text styles</a:t>
-            </a:r>
-          </a:p>
-          <a:p>
-            <a:pPr lvl="1"/>
-            <a:r>
-              <a:rPr lang="en-US"/>
-              <a:t>Second level</a:t>
-            </a:r>
-          </a:p>
-          <a:p>
-            <a:pPr lvl="2"/>
-            <a:r>
-              <a:rPr lang="en-US"/>
-              <a:t>Third level</a:t>
-            </a:r>
-          </a:p>
-          <a:p>
-            <a:pPr lvl="3"/>
-            <a:r>
-              <a:rPr lang="en-US"/>
-              <a:t>Fourth level</a:t>
-            </a:r>
-          </a:p>
-          <a:p>
-            <a:pPr lvl="4"/>
-            <a:r>
-              <a:rPr lang="en-US"/>
-              <a:t>Fifth level</a:t>
-            </a:r>
-          </a:p>
-        </p:txBody>
-      </p:sp>
-      <p:sp>
-        <p:nvSpPr>
-          <p:cNvPr id="6" name="Footer Placeholder 5"/>
-          <p:cNvSpPr>
-            <a:spLocks noGrp="1"/>
-          </p:cNvSpPr>
-          <p:nvPr>
-            <p:ph type="ftr" sz="quarter" idx="4"/>
-          </p:nvPr>
-        </p:nvSpPr>
-        <p:spPr>
-          <a:xfrm>
-            <a:off x="0" y="8685213"/>
-            <a:ext cx="2971800" cy="458787"/>
-          </a:xfrm>
-          <a:prstGeom prst="rect">
-            <a:avLst/>
-          </a:prstGeom>
-        </p:spPr>
-        <p:txBody>
-          <a:bodyPr vert="horz" lIns="91440" tIns="45720" rIns="91440" bIns="45720" rtlCol="0" anchor="b"/>
-          <a:lstStyle>
-            <a:lvl1pPr algn="l">
-              <a:defRPr sz="1200"/>
-            </a:lvl1pPr>
-          </a:lstStyle>
-          <a:p>
-            <a:endParaRPr lang="en-US"/>
-          </a:p>
-        </p:txBody>
-      </p:sp>
-      <p:sp>
-        <p:nvSpPr>
-          <p:cNvPr id="7" name="Slide Number Placeholder 6"/>
-          <p:cNvSpPr>
-            <a:spLocks noGrp="1"/>
-          </p:cNvSpPr>
-          <p:nvPr>
-            <p:ph type="sldNum" sz="quarter" idx="5"/>
-          </p:nvPr>
-        </p:nvSpPr>
-        <p:spPr>
-          <a:xfrm>
-            <a:off x="3884613" y="8685213"/>
-            <a:ext cx="2971800" cy="458787"/>
-          </a:xfrm>
-          <a:prstGeom prst="rect">
-            <a:avLst/>
-          </a:prstGeom>
-        </p:spPr>
-        <p:txBody>
-          <a:bodyPr vert="horz" lIns="91440" tIns="45720" rIns="91440" bIns="45720" rtlCol="0" anchor="b"/>
-          <a:lstStyle>
-            <a:lvl1pPr algn="r">
-              <a:defRPr sz="1200"/>
-            </a:lvl1pPr>
-          </a:lstStyle>
-          <a:p>
-            <a:fld id="{CE5E9CC1-C706-0F49-92D6-E571CC5EEA8F}" type="slidenum">
-              <a:rPr lang="en-US"/>
-              <a:t>‹#›</a:t>
-            </a:fld>
-            <a:endParaRPr lang="en-US"/>
-          </a:p>
-        </p:txBody>
-      </p:sp>
     </p:spTree>
     <p:extLst>
       <p:ext uri="{BB962C8B-B14F-4D97-AF65-F5344CB8AC3E}">
-        <p14:creationId xmlns:p14="http://schemas.microsoft.com/office/powerpoint/2010/main" val="1024086991"/>
+        <p14:creationId xmlns:p14="http://schemas.microsoft.com/office/powerpoint/2010/main" val="1216475510"/>
       </p:ext>
     </p:extLst>
   </p:cSld>
@@ -451,10 +306,6 @@
           <a:bodyPr/>
           <a:lstStyle/>
           <a:p>
-            <a:r>
-              <a:rPr lang="en-US" dirty="0"/>
-              <a:t/>
-            </a:r>
             <a:endParaRPr lang="en-US" dirty="0"/>
           </a:p>
         </p:txBody>
@@ -539,10 +390,6 @@
           <a:bodyPr/>
           <a:lstStyle/>
           <a:p>
-            <a:r>
-              <a:rPr lang="en-US" dirty="0"/>
-              <a:t/>
-            </a:r>
             <a:endParaRPr lang="en-US" dirty="0"/>
           </a:p>
         </p:txBody>
@@ -627,10 +474,6 @@
           <a:bodyPr/>
           <a:lstStyle/>
           <a:p>
-            <a:r>
-              <a:rPr lang="en-US" dirty="0"/>
-              <a:t/>
-            </a:r>
             <a:endParaRPr lang="en-US" dirty="0"/>
           </a:p>
         </p:txBody>
@@ -715,10 +558,6 @@
           <a:bodyPr/>
           <a:lstStyle/>
           <a:p>
-            <a:r>
-              <a:rPr lang="en-US" dirty="0"/>
-              <a:t/>
-            </a:r>
             <a:endParaRPr lang="en-US" dirty="0"/>
           </a:p>
         </p:txBody>
@@ -803,10 +642,6 @@
           <a:bodyPr/>
           <a:lstStyle/>
           <a:p>
-            <a:r>
-              <a:rPr lang="en-US" dirty="0"/>
-              <a:t/>
-            </a:r>
             <a:endParaRPr lang="en-US" dirty="0"/>
           </a:p>
         </p:txBody>
@@ -891,10 +726,6 @@
           <a:bodyPr/>
           <a:lstStyle/>
           <a:p>
-            <a:r>
-              <a:rPr lang="en-US" dirty="0"/>
-              <a:t/>
-            </a:r>
             <a:endParaRPr lang="en-US" dirty="0"/>
           </a:p>
         </p:txBody>
@@ -979,10 +810,6 @@
           <a:bodyPr/>
           <a:lstStyle/>
           <a:p>
-            <a:r>
-              <a:rPr lang="en-US" dirty="0"/>
-              <a:t/>
-            </a:r>
             <a:endParaRPr lang="en-US" dirty="0"/>
           </a:p>
         </p:txBody>
@@ -1067,10 +894,6 @@
           <a:bodyPr/>
           <a:lstStyle/>
           <a:p>
-            <a:r>
-              <a:rPr lang="en-US" dirty="0"/>
-              <a:t/>
-            </a:r>
             <a:endParaRPr lang="en-US" dirty="0"/>
           </a:p>
         </p:txBody>
@@ -1155,10 +978,6 @@
           <a:bodyPr/>
           <a:lstStyle/>
           <a:p>
-            <a:r>
-              <a:rPr lang="en-US" dirty="0"/>
-              <a:t/>
-            </a:r>
             <a:endParaRPr lang="en-US" dirty="0"/>
           </a:p>
         </p:txBody>
@@ -1243,10 +1062,6 @@
           <a:bodyPr/>
           <a:lstStyle/>
           <a:p>
-            <a:r>
-              <a:rPr lang="en-US" dirty="0"/>
-              <a:t/>
-            </a:r>
             <a:endParaRPr lang="en-US" dirty="0"/>
           </a:p>
         </p:txBody>
@@ -1336,14 +1151,14 @@
       </p:grpSpPr>
       <p:pic>
         <p:nvPicPr>
-          <p:cNvPr id="2" name="Image 0" descr="preencoded.png">    </p:cNvPr>
+          <p:cNvPr id="2" name="Image 0" descr="preencoded.png"/>
           <p:cNvPicPr>
             <a:picLocks noChangeAspect="1"/>
           </p:cNvPicPr>
           <p:nvPr/>
         </p:nvPicPr>
         <p:blipFill>
-          <a:blip r:embed="rId1"/>
+          <a:blip r:embed="rId2"/>
           <a:stretch>
             <a:fillRect/>
           </a:stretch>
@@ -1383,7 +1198,7 @@
       <p:pic>
         <p:nvPicPr>
           <p:cNvPr id="4" name="Image 1" descr="preencoded.png">
-            <a:hlinkClick r:id="rId3" tooltip=""/>
+            <a:hlinkClick r:id="rId3"/>
           </p:cNvPr>
           <p:cNvPicPr>
             <a:picLocks noChangeAspect="1"/>
@@ -1391,7 +1206,7 @@
           <p:nvPr/>
         </p:nvPicPr>
         <p:blipFill>
-          <a:blip r:embed="rId2"/>
+          <a:blip r:embed="rId4"/>
           <a:stretch>
             <a:fillRect/>
           </a:stretch>
@@ -1433,14 +1248,14 @@
       </p:grpSpPr>
       <p:pic>
         <p:nvPicPr>
-          <p:cNvPr id="2" name="Image 0" descr="preencoded.png">    </p:cNvPr>
+          <p:cNvPr id="2" name="Image 0" descr="preencoded.png"/>
           <p:cNvPicPr>
             <a:picLocks noChangeAspect="1"/>
           </p:cNvPicPr>
           <p:nvPr/>
         </p:nvPicPr>
         <p:blipFill>
-          <a:blip r:embed="rId1"/>
+          <a:blip r:embed="rId2"/>
           <a:stretch>
             <a:fillRect/>
           </a:stretch>
@@ -1480,7 +1295,7 @@
       <p:pic>
         <p:nvPicPr>
           <p:cNvPr id="4" name="Image 1" descr="preencoded.png">
-            <a:hlinkClick r:id="rId3" tooltip=""/>
+            <a:hlinkClick r:id="rId3"/>
           </p:cNvPr>
           <p:cNvPicPr>
             <a:picLocks noChangeAspect="1"/>
@@ -1488,7 +1303,7 @@
           <p:nvPr/>
         </p:nvPicPr>
         <p:blipFill>
-          <a:blip r:embed="rId2"/>
+          <a:blip r:embed="rId4"/>
           <a:stretch>
             <a:fillRect/>
           </a:stretch>
@@ -1530,14 +1345,14 @@
       </p:grpSpPr>
       <p:pic>
         <p:nvPicPr>
-          <p:cNvPr id="2" name="Image 0" descr="preencoded.png">    </p:cNvPr>
+          <p:cNvPr id="2" name="Image 0" descr="preencoded.png"/>
           <p:cNvPicPr>
             <a:picLocks noChangeAspect="1"/>
           </p:cNvPicPr>
           <p:nvPr/>
         </p:nvPicPr>
         <p:blipFill>
-          <a:blip r:embed="rId1"/>
+          <a:blip r:embed="rId2"/>
           <a:stretch>
             <a:fillRect/>
           </a:stretch>
@@ -1577,7 +1392,7 @@
       <p:pic>
         <p:nvPicPr>
           <p:cNvPr id="4" name="Image 1" descr="preencoded.png">
-            <a:hlinkClick r:id="rId3" tooltip=""/>
+            <a:hlinkClick r:id="rId3"/>
           </p:cNvPr>
           <p:cNvPicPr>
             <a:picLocks noChangeAspect="1"/>
@@ -1585,7 +1400,7 @@
           <p:nvPr/>
         </p:nvPicPr>
         <p:blipFill>
-          <a:blip r:embed="rId2"/>
+          <a:blip r:embed="rId4"/>
           <a:stretch>
             <a:fillRect/>
           </a:stretch>
@@ -1627,14 +1442,14 @@
       </p:grpSpPr>
       <p:pic>
         <p:nvPicPr>
-          <p:cNvPr id="2" name="Image 0" descr="preencoded.png">    </p:cNvPr>
+          <p:cNvPr id="2" name="Image 0" descr="preencoded.png"/>
           <p:cNvPicPr>
             <a:picLocks noChangeAspect="1"/>
           </p:cNvPicPr>
           <p:nvPr/>
         </p:nvPicPr>
         <p:blipFill>
-          <a:blip r:embed="rId1"/>
+          <a:blip r:embed="rId2"/>
           <a:stretch>
             <a:fillRect/>
           </a:stretch>
@@ -1674,7 +1489,7 @@
       <p:pic>
         <p:nvPicPr>
           <p:cNvPr id="4" name="Image 1" descr="preencoded.png">
-            <a:hlinkClick r:id="rId3" tooltip=""/>
+            <a:hlinkClick r:id="rId3"/>
           </p:cNvPr>
           <p:cNvPicPr>
             <a:picLocks noChangeAspect="1"/>
@@ -1682,7 +1497,7 @@
           <p:nvPr/>
         </p:nvPicPr>
         <p:blipFill>
-          <a:blip r:embed="rId2"/>
+          <a:blip r:embed="rId4"/>
           <a:stretch>
             <a:fillRect/>
           </a:stretch>
@@ -1724,14 +1539,14 @@
       </p:grpSpPr>
       <p:pic>
         <p:nvPicPr>
-          <p:cNvPr id="2" name="Image 0" descr="preencoded.png">    </p:cNvPr>
+          <p:cNvPr id="2" name="Image 0" descr="preencoded.png"/>
           <p:cNvPicPr>
             <a:picLocks noChangeAspect="1"/>
           </p:cNvPicPr>
           <p:nvPr/>
         </p:nvPicPr>
         <p:blipFill>
-          <a:blip r:embed="rId1"/>
+          <a:blip r:embed="rId2"/>
           <a:stretch>
             <a:fillRect/>
           </a:stretch>
@@ -1771,7 +1586,7 @@
       <p:pic>
         <p:nvPicPr>
           <p:cNvPr id="4" name="Image 1" descr="preencoded.png">
-            <a:hlinkClick r:id="rId3" tooltip=""/>
+            <a:hlinkClick r:id="rId3"/>
           </p:cNvPr>
           <p:cNvPicPr>
             <a:picLocks noChangeAspect="1"/>
@@ -1779,7 +1594,7 @@
           <p:nvPr/>
         </p:nvPicPr>
         <p:blipFill>
-          <a:blip r:embed="rId2"/>
+          <a:blip r:embed="rId4"/>
           <a:stretch>
             <a:fillRect/>
           </a:stretch>
@@ -1821,14 +1636,14 @@
       </p:grpSpPr>
       <p:pic>
         <p:nvPicPr>
-          <p:cNvPr id="2" name="Image 0" descr="preencoded.png">    </p:cNvPr>
+          <p:cNvPr id="2" name="Image 0" descr="preencoded.png"/>
           <p:cNvPicPr>
             <a:picLocks noChangeAspect="1"/>
           </p:cNvPicPr>
           <p:nvPr/>
         </p:nvPicPr>
         <p:blipFill>
-          <a:blip r:embed="rId1"/>
+          <a:blip r:embed="rId2"/>
           <a:stretch>
             <a:fillRect/>
           </a:stretch>
@@ -1868,7 +1683,7 @@
       <p:pic>
         <p:nvPicPr>
           <p:cNvPr id="4" name="Image 1" descr="preencoded.png">
-            <a:hlinkClick r:id="rId3" tooltip=""/>
+            <a:hlinkClick r:id="rId3"/>
           </p:cNvPr>
           <p:cNvPicPr>
             <a:picLocks noChangeAspect="1"/>
@@ -1876,7 +1691,7 @@
           <p:nvPr/>
         </p:nvPicPr>
         <p:blipFill>
-          <a:blip r:embed="rId2"/>
+          <a:blip r:embed="rId4"/>
           <a:stretch>
             <a:fillRect/>
           </a:stretch>
@@ -1918,14 +1733,14 @@
       </p:grpSpPr>
       <p:pic>
         <p:nvPicPr>
-          <p:cNvPr id="2" name="Image 0" descr="preencoded.png">    </p:cNvPr>
+          <p:cNvPr id="2" name="Image 0" descr="preencoded.png"/>
           <p:cNvPicPr>
             <a:picLocks noChangeAspect="1"/>
           </p:cNvPicPr>
           <p:nvPr/>
         </p:nvPicPr>
         <p:blipFill>
-          <a:blip r:embed="rId1"/>
+          <a:blip r:embed="rId2"/>
           <a:stretch>
             <a:fillRect/>
           </a:stretch>
@@ -1965,7 +1780,7 @@
       <p:pic>
         <p:nvPicPr>
           <p:cNvPr id="4" name="Image 1" descr="preencoded.png">
-            <a:hlinkClick r:id="rId3" tooltip=""/>
+            <a:hlinkClick r:id="rId3"/>
           </p:cNvPr>
           <p:cNvPicPr>
             <a:picLocks noChangeAspect="1"/>
@@ -1973,7 +1788,7 @@
           <p:nvPr/>
         </p:nvPicPr>
         <p:blipFill>
-          <a:blip r:embed="rId2"/>
+          <a:blip r:embed="rId4"/>
           <a:stretch>
             <a:fillRect/>
           </a:stretch>
@@ -2015,14 +1830,14 @@
       </p:grpSpPr>
       <p:pic>
         <p:nvPicPr>
-          <p:cNvPr id="2" name="Image 0" descr="preencoded.png">    </p:cNvPr>
+          <p:cNvPr id="2" name="Image 0" descr="preencoded.png"/>
           <p:cNvPicPr>
             <a:picLocks noChangeAspect="1"/>
           </p:cNvPicPr>
           <p:nvPr/>
         </p:nvPicPr>
         <p:blipFill>
-          <a:blip r:embed="rId1"/>
+          <a:blip r:embed="rId2"/>
           <a:stretch>
             <a:fillRect/>
           </a:stretch>
@@ -2062,7 +1877,7 @@
       <p:pic>
         <p:nvPicPr>
           <p:cNvPr id="4" name="Image 1" descr="preencoded.png">
-            <a:hlinkClick r:id="rId3" tooltip=""/>
+            <a:hlinkClick r:id="rId3"/>
           </p:cNvPr>
           <p:cNvPicPr>
             <a:picLocks noChangeAspect="1"/>
@@ -2070,7 +1885,7 @@
           <p:nvPr/>
         </p:nvPicPr>
         <p:blipFill>
-          <a:blip r:embed="rId2"/>
+          <a:blip r:embed="rId4"/>
           <a:stretch>
             <a:fillRect/>
           </a:stretch>
@@ -2112,14 +1927,14 @@
       </p:grpSpPr>
       <p:pic>
         <p:nvPicPr>
-          <p:cNvPr id="2" name="Image 0" descr="preencoded.png">    </p:cNvPr>
+          <p:cNvPr id="2" name="Image 0" descr="preencoded.png"/>
           <p:cNvPicPr>
             <a:picLocks noChangeAspect="1"/>
           </p:cNvPicPr>
           <p:nvPr/>
         </p:nvPicPr>
         <p:blipFill>
-          <a:blip r:embed="rId1"/>
+          <a:blip r:embed="rId2"/>
           <a:stretch>
             <a:fillRect/>
           </a:stretch>
@@ -2159,7 +1974,7 @@
       <p:pic>
         <p:nvPicPr>
           <p:cNvPr id="4" name="Image 1" descr="preencoded.png">
-            <a:hlinkClick r:id="rId3" tooltip=""/>
+            <a:hlinkClick r:id="rId3"/>
           </p:cNvPr>
           <p:cNvPicPr>
             <a:picLocks noChangeAspect="1"/>
@@ -2167,7 +1982,7 @@
           <p:nvPr/>
         </p:nvPicPr>
         <p:blipFill>
-          <a:blip r:embed="rId2"/>
+          <a:blip r:embed="rId4"/>
           <a:stretch>
             <a:fillRect/>
           </a:stretch>
@@ -2209,14 +2024,14 @@
       </p:grpSpPr>
       <p:pic>
         <p:nvPicPr>
-          <p:cNvPr id="2" name="Image 0" descr="preencoded.png">    </p:cNvPr>
+          <p:cNvPr id="2" name="Image 0" descr="preencoded.png"/>
           <p:cNvPicPr>
             <a:picLocks noChangeAspect="1"/>
           </p:cNvPicPr>
           <p:nvPr/>
         </p:nvPicPr>
         <p:blipFill>
-          <a:blip r:embed="rId1"/>
+          <a:blip r:embed="rId2"/>
           <a:stretch>
             <a:fillRect/>
           </a:stretch>
@@ -2256,7 +2071,7 @@
       <p:pic>
         <p:nvPicPr>
           <p:cNvPr id="4" name="Image 1" descr="preencoded.png">
-            <a:hlinkClick r:id="rId3" tooltip=""/>
+            <a:hlinkClick r:id="rId3"/>
           </p:cNvPr>
           <p:cNvPicPr>
             <a:picLocks noChangeAspect="1"/>
@@ -2264,7 +2079,7 @@
           <p:nvPr/>
         </p:nvPicPr>
         <p:blipFill>
-          <a:blip r:embed="rId2"/>
+          <a:blip r:embed="rId4"/>
           <a:stretch>
             <a:fillRect/>
           </a:stretch>
@@ -2290,6 +2105,11 @@
 <file path=ppt/slideMasters/slideMaster1.xml><?xml version="1.0" encoding="utf-8"?>
 <p:sldMaster xmlns:a="http://schemas.openxmlformats.org/drawingml/2006/main" xmlns:r="http://schemas.openxmlformats.org/officeDocument/2006/relationships" xmlns:p="http://schemas.openxmlformats.org/presentationml/2006/main">
   <p:cSld>
+    <p:bg>
+      <p:bgRef idx="1001">
+        <a:schemeClr val="bg1"/>
+      </p:bgRef>
+    </p:bg>
     <p:spTree>
       <p:nvGrpSpPr>
         <p:cNvPr id="1" name=""/>
@@ -2593,14 +2413,14 @@
       </p:grpSpPr>
       <p:pic>
         <p:nvPicPr>
-          <p:cNvPr id="2" name="Image 0" descr="preencoded.png">    </p:cNvPr>
+          <p:cNvPr id="2" name="Image 0" descr="preencoded.png"/>
           <p:cNvPicPr>
             <a:picLocks noChangeAspect="1"/>
           </p:cNvPicPr>
           <p:nvPr/>
         </p:nvPicPr>
         <p:blipFill>
-          <a:blip r:embed="rId1"/>
+          <a:blip r:embed="rId3"/>
           <a:stretch>
             <a:fillRect/>
           </a:stretch>
@@ -2636,7 +2456,7 @@
           <a:bodyPr wrap="none" lIns="0" tIns="0" rIns="0" bIns="0" rtlCol="0" anchor="t"/>
           <a:lstStyle/>
           <a:p>
-            <a:pPr algn="l" indent="0" marL="0">
+            <a:pPr marL="0" indent="0" algn="l">
               <a:lnSpc>
                 <a:spcPts val="3200"/>
               </a:lnSpc>
@@ -2678,7 +2498,7 @@
           <a:bodyPr wrap="square" lIns="0" tIns="0" rIns="0" bIns="0" rtlCol="0" anchor="t"/>
           <a:lstStyle/>
           <a:p>
-            <a:pPr algn="l" indent="0" marL="0">
+            <a:pPr marL="0" indent="0" algn="l">
               <a:lnSpc>
                 <a:spcPts val="1550"/>
               </a:lnSpc>
@@ -2742,7 +2562,7 @@
           <a:bodyPr wrap="none" lIns="0" tIns="0" rIns="0" bIns="0" rtlCol="0" anchor="t"/>
           <a:lstStyle/>
           <a:p>
-            <a:pPr algn="l" indent="0" marL="0">
+            <a:pPr marL="0" indent="0" algn="l">
               <a:lnSpc>
                 <a:spcPts val="1250"/>
               </a:lnSpc>
@@ -2809,7 +2629,7 @@
           <a:bodyPr wrap="none" lIns="0" tIns="0" rIns="0" bIns="0" rtlCol="0" anchor="t"/>
           <a:lstStyle/>
           <a:p>
-            <a:pPr algn="l" indent="0" marL="0">
+            <a:pPr marL="0" indent="0" algn="l">
               <a:lnSpc>
                 <a:spcPts val="1250"/>
               </a:lnSpc>
@@ -2876,7 +2696,7 @@
           <a:bodyPr wrap="none" lIns="0" tIns="0" rIns="0" bIns="0" rtlCol="0" anchor="t"/>
           <a:lstStyle/>
           <a:p>
-            <a:pPr algn="l" indent="0" marL="0">
+            <a:pPr marL="0" indent="0" algn="l">
               <a:lnSpc>
                 <a:spcPts val="3200"/>
               </a:lnSpc>
@@ -2918,7 +2738,7 @@
           <a:bodyPr wrap="square" lIns="0" tIns="0" rIns="0" bIns="0" rtlCol="0" anchor="t"/>
           <a:lstStyle/>
           <a:p>
-            <a:pPr algn="l" indent="0" marL="0">
+            <a:pPr marL="0" indent="0" algn="l">
               <a:lnSpc>
                 <a:spcPts val="1550"/>
               </a:lnSpc>
@@ -2987,7 +2807,7 @@
           <a:bodyPr wrap="none" lIns="0" tIns="0" rIns="0" bIns="0" rtlCol="0" anchor="ctr"/>
           <a:lstStyle/>
           <a:p>
-            <a:pPr algn="ctr" indent="0" marL="0">
+            <a:pPr marL="0" indent="0" algn="ctr">
               <a:lnSpc>
                 <a:spcPct val="100000"/>
               </a:lnSpc>
@@ -3029,7 +2849,7 @@
           <a:bodyPr wrap="none" lIns="0" tIns="0" rIns="0" bIns="0" rtlCol="0" anchor="t"/>
           <a:lstStyle/>
           <a:p>
-            <a:pPr algn="l" indent="0" marL="0">
+            <a:pPr marL="0" indent="0" algn="l">
               <a:lnSpc>
                 <a:spcPts val="1600"/>
               </a:lnSpc>
@@ -3071,7 +2891,7 @@
           <a:bodyPr wrap="square" lIns="0" tIns="0" rIns="0" bIns="0" rtlCol="0" anchor="t"/>
           <a:lstStyle/>
           <a:p>
-            <a:pPr algn="l" indent="0" marL="0">
+            <a:pPr marL="0" indent="0" algn="l">
               <a:lnSpc>
                 <a:spcPts val="1550"/>
               </a:lnSpc>
@@ -3088,12 +2908,6 @@
               </a:rPr>
               <a:t>Electronics generates nearly </a:t>
             </a:r>
-            <a:pPr algn="l" indent="0" marL="0">
-              <a:lnSpc>
-                <a:spcPts val="1550"/>
-              </a:lnSpc>
-              <a:buNone/>
-            </a:pPr>
             <a:r>
               <a:rPr lang="en-US" sz="950" b="1" dirty="0">
                 <a:solidFill>
@@ -3105,12 +2919,6 @@
               </a:rPr>
               <a:t>$486K</a:t>
             </a:r>
-            <a:pPr algn="l" indent="0" marL="0">
-              <a:lnSpc>
-                <a:spcPts val="1550"/>
-              </a:lnSpc>
-              <a:buNone/>
-            </a:pPr>
             <a:r>
               <a:rPr lang="en-US" sz="950" dirty="0">
                 <a:solidFill>
@@ -3174,7 +2982,7 @@
           <a:bodyPr wrap="none" lIns="0" tIns="0" rIns="0" bIns="0" rtlCol="0" anchor="ctr"/>
           <a:lstStyle/>
           <a:p>
-            <a:pPr algn="ctr" indent="0" marL="0">
+            <a:pPr marL="0" indent="0" algn="ctr">
               <a:lnSpc>
                 <a:spcPct val="100000"/>
               </a:lnSpc>
@@ -3216,7 +3024,7 @@
           <a:bodyPr wrap="none" lIns="0" tIns="0" rIns="0" bIns="0" rtlCol="0" anchor="t"/>
           <a:lstStyle/>
           <a:p>
-            <a:pPr algn="l" indent="0" marL="0">
+            <a:pPr marL="0" indent="0" algn="l">
               <a:lnSpc>
                 <a:spcPts val="1600"/>
               </a:lnSpc>
@@ -3258,7 +3066,7 @@
           <a:bodyPr wrap="square" lIns="0" tIns="0" rIns="0" bIns="0" rtlCol="0" anchor="t"/>
           <a:lstStyle/>
           <a:p>
-            <a:pPr algn="l" indent="0" marL="0">
+            <a:pPr marL="0" indent="0" algn="l">
               <a:lnSpc>
                 <a:spcPts val="1550"/>
               </a:lnSpc>
@@ -3275,12 +3083,6 @@
               </a:rPr>
               <a:t>Subscribers spend </a:t>
             </a:r>
-            <a:pPr algn="l" indent="0" marL="0">
-              <a:lnSpc>
-                <a:spcPts val="1550"/>
-              </a:lnSpc>
-              <a:buNone/>
-            </a:pPr>
             <a:r>
               <a:rPr lang="en-US" sz="950" b="1" dirty="0">
                 <a:solidFill>
@@ -3292,12 +3094,6 @@
               </a:rPr>
               <a:t>63% more per transaction</a:t>
             </a:r>
-            <a:pPr algn="l" indent="0" marL="0">
-              <a:lnSpc>
-                <a:spcPts val="1550"/>
-              </a:lnSpc>
-              <a:buNone/>
-            </a:pPr>
             <a:r>
               <a:rPr lang="en-US" sz="950" dirty="0">
                 <a:solidFill>
@@ -3361,7 +3157,7 @@
           <a:bodyPr wrap="none" lIns="0" tIns="0" rIns="0" bIns="0" rtlCol="0" anchor="ctr"/>
           <a:lstStyle/>
           <a:p>
-            <a:pPr algn="ctr" indent="0" marL="0">
+            <a:pPr marL="0" indent="0" algn="ctr">
               <a:lnSpc>
                 <a:spcPct val="100000"/>
               </a:lnSpc>
@@ -3403,7 +3199,7 @@
           <a:bodyPr wrap="square" lIns="0" tIns="0" rIns="0" bIns="0" rtlCol="0" anchor="t"/>
           <a:lstStyle/>
           <a:p>
-            <a:pPr algn="l" indent="0" marL="0">
+            <a:pPr marL="0" indent="0" algn="l">
               <a:lnSpc>
                 <a:spcPts val="1600"/>
               </a:lnSpc>
@@ -3445,7 +3241,7 @@
           <a:bodyPr wrap="square" lIns="0" tIns="0" rIns="0" bIns="0" rtlCol="0" anchor="t"/>
           <a:lstStyle/>
           <a:p>
-            <a:pPr algn="l" indent="0" marL="0">
+            <a:pPr marL="0" indent="0" algn="l">
               <a:lnSpc>
                 <a:spcPts val="1550"/>
               </a:lnSpc>
@@ -3462,12 +3258,6 @@
               </a:rPr>
               <a:t>Discounted orders have a </a:t>
             </a:r>
-            <a:pPr algn="l" indent="0" marL="0">
-              <a:lnSpc>
-                <a:spcPts val="1550"/>
-              </a:lnSpc>
-              <a:buNone/>
-            </a:pPr>
             <a:r>
               <a:rPr lang="en-US" sz="950" b="1" dirty="0">
                 <a:solidFill>
@@ -3479,12 +3269,6 @@
               </a:rPr>
               <a:t>higher average value</a:t>
             </a:r>
-            <a:pPr algn="l" indent="0" marL="0">
-              <a:lnSpc>
-                <a:spcPts val="1550"/>
-              </a:lnSpc>
-              <a:buNone/>
-            </a:pPr>
             <a:r>
               <a:rPr lang="en-US" sz="950" dirty="0">
                 <a:solidFill>
@@ -3548,7 +3332,7 @@
           <a:bodyPr wrap="none" lIns="0" tIns="0" rIns="0" bIns="0" rtlCol="0" anchor="ctr"/>
           <a:lstStyle/>
           <a:p>
-            <a:pPr algn="ctr" indent="0" marL="0">
+            <a:pPr marL="0" indent="0" algn="ctr">
               <a:lnSpc>
                 <a:spcPct val="100000"/>
               </a:lnSpc>
@@ -3590,7 +3374,7 @@
           <a:bodyPr wrap="none" lIns="0" tIns="0" rIns="0" bIns="0" rtlCol="0" anchor="t"/>
           <a:lstStyle/>
           <a:p>
-            <a:pPr algn="l" indent="0" marL="0">
+            <a:pPr marL="0" indent="0" algn="l">
               <a:lnSpc>
                 <a:spcPts val="1600"/>
               </a:lnSpc>
@@ -3632,7 +3416,7 @@
           <a:bodyPr wrap="square" lIns="0" tIns="0" rIns="0" bIns="0" rtlCol="0" anchor="t"/>
           <a:lstStyle/>
           <a:p>
-            <a:pPr algn="l" indent="0" marL="0">
+            <a:pPr marL="0" indent="0" algn="l">
               <a:lnSpc>
                 <a:spcPts val="1550"/>
               </a:lnSpc>
@@ -3649,12 +3433,6 @@
               </a:rPr>
               <a:t>The </a:t>
             </a:r>
-            <a:pPr algn="l" indent="0" marL="0">
-              <a:lnSpc>
-                <a:spcPts val="1550"/>
-              </a:lnSpc>
-              <a:buNone/>
-            </a:pPr>
             <a:r>
               <a:rPr lang="en-US" sz="950" b="1" dirty="0">
                 <a:solidFill>
@@ -3666,12 +3444,6 @@
               </a:rPr>
               <a:t>51+ age group</a:t>
             </a:r>
-            <a:pPr algn="l" indent="0" marL="0">
-              <a:lnSpc>
-                <a:spcPts val="1550"/>
-              </a:lnSpc>
-              <a:buNone/>
-            </a:pPr>
             <a:r>
               <a:rPr lang="en-US" sz="950" dirty="0">
                 <a:solidFill>
@@ -3733,7 +3505,7 @@
           <a:bodyPr wrap="none" lIns="0" tIns="0" rIns="0" bIns="0" rtlCol="0" anchor="t"/>
           <a:lstStyle/>
           <a:p>
-            <a:pPr algn="l" indent="0" marL="0">
+            <a:pPr marL="0" indent="0" algn="l">
               <a:lnSpc>
                 <a:spcPts val="3200"/>
               </a:lnSpc>
@@ -3775,7 +3547,7 @@
           <a:bodyPr wrap="square" lIns="0" tIns="0" rIns="0" bIns="0" rtlCol="0" anchor="t"/>
           <a:lstStyle/>
           <a:p>
-            <a:pPr algn="l" indent="0" marL="0">
+            <a:pPr marL="0" indent="0" algn="l">
               <a:lnSpc>
                 <a:spcPts val="1550"/>
               </a:lnSpc>
@@ -3841,7 +3613,7 @@
           <a:bodyPr wrap="none" lIns="0" tIns="0" rIns="0" bIns="0" rtlCol="0" anchor="t"/>
           <a:lstStyle/>
           <a:p>
-            <a:pPr algn="l" indent="0" marL="0">
+            <a:pPr marL="0" indent="0" algn="l">
               <a:lnSpc>
                 <a:spcPts val="1600"/>
               </a:lnSpc>
@@ -3883,7 +3655,7 @@
           <a:bodyPr wrap="square" lIns="0" tIns="0" rIns="0" bIns="0" rtlCol="0" anchor="t"/>
           <a:lstStyle/>
           <a:p>
-            <a:pPr algn="l" marL="342900" indent="-342900">
+            <a:pPr marL="342900" indent="-342900" algn="l">
               <a:lnSpc>
                 <a:spcPts val="1550"/>
               </a:lnSpc>
@@ -3901,7 +3673,21 @@
               </a:rPr>
               <a:t>Type:</a:t>
             </a:r>
-            <a:pPr algn="l" marL="342900" indent="-342900">
+            <a:r>
+              <a:rPr lang="en-US" sz="950" dirty="0">
+                <a:solidFill>
+                  <a:srgbClr val="000000"/>
+                </a:solidFill>
+                <a:latin typeface="Inter" pitchFamily="34" charset="0"/>
+                <a:ea typeface="Inter" pitchFamily="34" charset="-122"/>
+                <a:cs typeface="Inter" pitchFamily="34" charset="-120"/>
+              </a:rPr>
+              <a:t> E-Commerce Tabular Data</a:t>
+            </a:r>
+            <a:endParaRPr lang="en-US" sz="950" dirty="0"/>
+          </a:p>
+          <a:p>
+            <a:pPr marL="342900" indent="-342900" algn="l">
               <a:lnSpc>
                 <a:spcPts val="1550"/>
               </a:lnSpc>
@@ -3909,6 +3695,17 @@
               <a:buChar char="•"/>
             </a:pPr>
             <a:r>
+              <a:rPr lang="en-US" sz="950" b="1" dirty="0">
+                <a:solidFill>
+                  <a:srgbClr val="000000"/>
+                </a:solidFill>
+                <a:latin typeface="Inter" pitchFamily="34" charset="0"/>
+                <a:ea typeface="Inter" pitchFamily="34" charset="-122"/>
+                <a:cs typeface="Inter" pitchFamily="34" charset="-120"/>
+              </a:rPr>
+              <a:t>Total Records:</a:t>
+            </a:r>
+            <a:r>
               <a:rPr lang="en-US" sz="950" dirty="0">
                 <a:solidFill>
                   <a:srgbClr val="000000"/>
@@ -3917,12 +3714,12 @@
                 <a:ea typeface="Inter" pitchFamily="34" charset="-122"/>
                 <a:cs typeface="Inter" pitchFamily="34" charset="-120"/>
               </a:rPr>
-              <a:t> E-Commerce Tabular Data</a:t>
+              <a:t> 5,000 customers</a:t>
             </a:r>
             <a:endParaRPr lang="en-US" sz="950" dirty="0"/>
           </a:p>
           <a:p>
-            <a:pPr algn="l" marL="342900" indent="-342900">
+            <a:pPr marL="342900" indent="-342900" algn="l">
               <a:lnSpc>
                 <a:spcPts val="1550"/>
               </a:lnSpc>
@@ -3938,9 +3735,23 @@
                 <a:ea typeface="Inter" pitchFamily="34" charset="-122"/>
                 <a:cs typeface="Inter" pitchFamily="34" charset="-120"/>
               </a:rPr>
-              <a:t>Total Records:</a:t>
-            </a:r>
-            <a:pPr algn="l" marL="342900" indent="-342900">
+              <a:t>Columns:</a:t>
+            </a:r>
+            <a:r>
+              <a:rPr lang="en-US" sz="950" dirty="0">
+                <a:solidFill>
+                  <a:srgbClr val="000000"/>
+                </a:solidFill>
+                <a:latin typeface="Inter" pitchFamily="34" charset="0"/>
+                <a:ea typeface="Inter" pitchFamily="34" charset="-122"/>
+                <a:cs typeface="Inter" pitchFamily="34" charset="-120"/>
+              </a:rPr>
+              <a:t> 17 attributes</a:t>
+            </a:r>
+            <a:endParaRPr lang="en-US" sz="950" dirty="0"/>
+          </a:p>
+          <a:p>
+            <a:pPr marL="342900" indent="-342900" algn="l">
               <a:lnSpc>
                 <a:spcPts val="1550"/>
               </a:lnSpc>
@@ -3948,6 +3759,17 @@
               <a:buChar char="•"/>
             </a:pPr>
             <a:r>
+              <a:rPr lang="en-US" sz="950" b="1" dirty="0">
+                <a:solidFill>
+                  <a:srgbClr val="000000"/>
+                </a:solidFill>
+                <a:latin typeface="Inter" pitchFamily="34" charset="0"/>
+                <a:ea typeface="Inter" pitchFamily="34" charset="-122"/>
+                <a:cs typeface="Inter" pitchFamily="34" charset="-120"/>
+              </a:rPr>
+              <a:t>Numerical:</a:t>
+            </a:r>
+            <a:r>
               <a:rPr lang="en-US" sz="950" dirty="0">
                 <a:solidFill>
                   <a:srgbClr val="000000"/>
@@ -3956,12 +3778,12 @@
                 <a:ea typeface="Inter" pitchFamily="34" charset="-122"/>
                 <a:cs typeface="Inter" pitchFamily="34" charset="-120"/>
               </a:rPr>
-              <a:t> 5,000 customers</a:t>
+              <a:t> Age, Purchase Amount, Previous Purchases</a:t>
             </a:r>
             <a:endParaRPr lang="en-US" sz="950" dirty="0"/>
           </a:p>
           <a:p>
-            <a:pPr algn="l" marL="342900" indent="-342900">
+            <a:pPr marL="342900" indent="-342900" algn="l">
               <a:lnSpc>
                 <a:spcPts val="1550"/>
               </a:lnSpc>
@@ -3977,93 +3799,8 @@
                 <a:ea typeface="Inter" pitchFamily="34" charset="-122"/>
                 <a:cs typeface="Inter" pitchFamily="34" charset="-120"/>
               </a:rPr>
-              <a:t>Columns:</a:t>
-            </a:r>
-            <a:pPr algn="l" marL="342900" indent="-342900">
-              <a:lnSpc>
-                <a:spcPts val="1550"/>
-              </a:lnSpc>
-              <a:buSzPct val="100000"/>
-              <a:buChar char="•"/>
-            </a:pPr>
-            <a:r>
-              <a:rPr lang="en-US" sz="950" dirty="0">
-                <a:solidFill>
-                  <a:srgbClr val="000000"/>
-                </a:solidFill>
-                <a:latin typeface="Inter" pitchFamily="34" charset="0"/>
-                <a:ea typeface="Inter" pitchFamily="34" charset="-122"/>
-                <a:cs typeface="Inter" pitchFamily="34" charset="-120"/>
-              </a:rPr>
-              <a:t> 17 attributes</a:t>
-            </a:r>
-            <a:endParaRPr lang="en-US" sz="950" dirty="0"/>
-          </a:p>
-          <a:p>
-            <a:pPr algn="l" marL="342900" indent="-342900">
-              <a:lnSpc>
-                <a:spcPts val="1550"/>
-              </a:lnSpc>
-              <a:buSzPct val="100000"/>
-              <a:buChar char="•"/>
-            </a:pPr>
-            <a:r>
-              <a:rPr lang="en-US" sz="950" b="1" dirty="0">
-                <a:solidFill>
-                  <a:srgbClr val="000000"/>
-                </a:solidFill>
-                <a:latin typeface="Inter" pitchFamily="34" charset="0"/>
-                <a:ea typeface="Inter" pitchFamily="34" charset="-122"/>
-                <a:cs typeface="Inter" pitchFamily="34" charset="-120"/>
-              </a:rPr>
-              <a:t>Numerical:</a:t>
-            </a:r>
-            <a:pPr algn="l" marL="342900" indent="-342900">
-              <a:lnSpc>
-                <a:spcPts val="1550"/>
-              </a:lnSpc>
-              <a:buSzPct val="100000"/>
-              <a:buChar char="•"/>
-            </a:pPr>
-            <a:r>
-              <a:rPr lang="en-US" sz="950" dirty="0">
-                <a:solidFill>
-                  <a:srgbClr val="000000"/>
-                </a:solidFill>
-                <a:latin typeface="Inter" pitchFamily="34" charset="0"/>
-                <a:ea typeface="Inter" pitchFamily="34" charset="-122"/>
-                <a:cs typeface="Inter" pitchFamily="34" charset="-120"/>
-              </a:rPr>
-              <a:t> Age, Purchase Amount, Previous Purchases</a:t>
-            </a:r>
-            <a:endParaRPr lang="en-US" sz="950" dirty="0"/>
-          </a:p>
-          <a:p>
-            <a:pPr algn="l" marL="342900" indent="-342900">
-              <a:lnSpc>
-                <a:spcPts val="1550"/>
-              </a:lnSpc>
-              <a:buSzPct val="100000"/>
-              <a:buChar char="•"/>
-            </a:pPr>
-            <a:r>
-              <a:rPr lang="en-US" sz="950" b="1" dirty="0">
-                <a:solidFill>
-                  <a:srgbClr val="000000"/>
-                </a:solidFill>
-                <a:latin typeface="Inter" pitchFamily="34" charset="0"/>
-                <a:ea typeface="Inter" pitchFamily="34" charset="-122"/>
-                <a:cs typeface="Inter" pitchFamily="34" charset="-120"/>
-              </a:rPr>
               <a:t>Categorical:</a:t>
             </a:r>
-            <a:pPr algn="l" marL="342900" indent="-342900">
-              <a:lnSpc>
-                <a:spcPts val="1550"/>
-              </a:lnSpc>
-              <a:buSzPct val="100000"/>
-              <a:buChar char="•"/>
-            </a:pPr>
             <a:r>
               <a:rPr lang="en-US" sz="950" dirty="0">
                 <a:solidFill>
@@ -4100,7 +3837,7 @@
           <a:bodyPr wrap="none" lIns="0" tIns="0" rIns="0" bIns="0" rtlCol="0" anchor="t"/>
           <a:lstStyle/>
           <a:p>
-            <a:pPr algn="l" indent="0" marL="0">
+            <a:pPr marL="0" indent="0" algn="l">
               <a:lnSpc>
                 <a:spcPts val="1600"/>
               </a:lnSpc>
@@ -4142,7 +3879,7 @@
           <a:bodyPr wrap="square" lIns="0" tIns="0" rIns="0" bIns="0" rtlCol="0" anchor="t"/>
           <a:lstStyle/>
           <a:p>
-            <a:pPr algn="l" indent="0" marL="0">
+            <a:pPr marL="0" indent="0" algn="l">
               <a:lnSpc>
                 <a:spcPts val="1550"/>
               </a:lnSpc>
@@ -4187,14 +3924,14 @@
       </p:sp>
       <p:pic>
         <p:nvPicPr>
-          <p:cNvPr id="10" name="Image 0" descr="preencoded.png">    </p:cNvPr>
+          <p:cNvPr id="10" name="Image 0" descr="preencoded.png"/>
           <p:cNvPicPr>
             <a:picLocks noChangeAspect="1"/>
           </p:cNvPicPr>
           <p:nvPr/>
         </p:nvPicPr>
         <p:blipFill>
-          <a:blip r:embed="rId1"/>
+          <a:blip r:embed="rId3"/>
           <a:stretch>
             <a:fillRect/>
           </a:stretch>
@@ -4230,7 +3967,7 @@
           <a:bodyPr wrap="square" lIns="0" tIns="0" rIns="0" bIns="0" rtlCol="0" anchor="t"/>
           <a:lstStyle/>
           <a:p>
-            <a:pPr algn="l" indent="0" marL="0">
+            <a:pPr marL="0" indent="0" algn="l">
               <a:lnSpc>
                 <a:spcPts val="1550"/>
               </a:lnSpc>
@@ -4297,7 +4034,7 @@
           <a:bodyPr wrap="none" lIns="0" tIns="0" rIns="0" bIns="0" rtlCol="0" anchor="t"/>
           <a:lstStyle/>
           <a:p>
-            <a:pPr algn="l" indent="0" marL="0">
+            <a:pPr marL="0" indent="0" algn="l">
               <a:lnSpc>
                 <a:spcPts val="3200"/>
               </a:lnSpc>
@@ -4339,7 +4076,7 @@
           <a:bodyPr wrap="square" lIns="0" tIns="0" rIns="0" bIns="0" rtlCol="0" anchor="t"/>
           <a:lstStyle/>
           <a:p>
-            <a:pPr algn="l" indent="0" marL="0">
+            <a:pPr marL="0" indent="0" algn="l">
               <a:lnSpc>
                 <a:spcPts val="1550"/>
               </a:lnSpc>
@@ -4408,7 +4145,7 @@
           <a:bodyPr wrap="none" lIns="0" tIns="0" rIns="0" bIns="0" rtlCol="0" anchor="t"/>
           <a:lstStyle/>
           <a:p>
-            <a:pPr algn="l" indent="0" marL="0">
+            <a:pPr marL="0" indent="0" algn="l">
               <a:lnSpc>
                 <a:spcPts val="1600"/>
               </a:lnSpc>
@@ -4450,7 +4187,7 @@
           <a:bodyPr wrap="square" lIns="0" tIns="0" rIns="0" bIns="0" rtlCol="0" anchor="t"/>
           <a:lstStyle/>
           <a:p>
-            <a:pPr algn="l" indent="0" marL="0">
+            <a:pPr marL="0" indent="0" algn="l">
               <a:lnSpc>
                 <a:spcPts val="1550"/>
               </a:lnSpc>
@@ -4519,7 +4256,7 @@
           <a:bodyPr wrap="none" lIns="0" tIns="0" rIns="0" bIns="0" rtlCol="0" anchor="t"/>
           <a:lstStyle/>
           <a:p>
-            <a:pPr algn="l" indent="0" marL="0">
+            <a:pPr marL="0" indent="0" algn="l">
               <a:lnSpc>
                 <a:spcPts val="1600"/>
               </a:lnSpc>
@@ -4561,7 +4298,7 @@
           <a:bodyPr wrap="square" lIns="0" tIns="0" rIns="0" bIns="0" rtlCol="0" anchor="t"/>
           <a:lstStyle/>
           <a:p>
-            <a:pPr algn="l" indent="0" marL="0">
+            <a:pPr marL="0" indent="0" algn="l">
               <a:lnSpc>
                 <a:spcPts val="1550"/>
               </a:lnSpc>
@@ -4630,7 +4367,7 @@
           <a:bodyPr wrap="none" lIns="0" tIns="0" rIns="0" bIns="0" rtlCol="0" anchor="t"/>
           <a:lstStyle/>
           <a:p>
-            <a:pPr algn="l" indent="0" marL="0">
+            <a:pPr marL="0" indent="0" algn="l">
               <a:lnSpc>
                 <a:spcPts val="1600"/>
               </a:lnSpc>
@@ -4672,7 +4409,7 @@
           <a:bodyPr wrap="square" lIns="0" tIns="0" rIns="0" bIns="0" rtlCol="0" anchor="t"/>
           <a:lstStyle/>
           <a:p>
-            <a:pPr algn="l" indent="0" marL="0">
+            <a:pPr marL="0" indent="0" algn="l">
               <a:lnSpc>
                 <a:spcPts val="1550"/>
               </a:lnSpc>
@@ -4741,7 +4478,7 @@
           <a:bodyPr wrap="none" lIns="0" tIns="0" rIns="0" bIns="0" rtlCol="0" anchor="t"/>
           <a:lstStyle/>
           <a:p>
-            <a:pPr algn="l" indent="0" marL="0">
+            <a:pPr marL="0" indent="0" algn="l">
               <a:lnSpc>
                 <a:spcPts val="1600"/>
               </a:lnSpc>
@@ -4783,7 +4520,7 @@
           <a:bodyPr wrap="square" lIns="0" tIns="0" rIns="0" bIns="0" rtlCol="0" anchor="t"/>
           <a:lstStyle/>
           <a:p>
-            <a:pPr algn="l" indent="0" marL="0">
+            <a:pPr marL="0" indent="0" algn="l">
               <a:lnSpc>
                 <a:spcPts val="1550"/>
               </a:lnSpc>
@@ -4852,7 +4589,7 @@
           <a:bodyPr wrap="none" lIns="0" tIns="0" rIns="0" bIns="0" rtlCol="0" anchor="t"/>
           <a:lstStyle/>
           <a:p>
-            <a:pPr algn="l" indent="0" marL="0">
+            <a:pPr marL="0" indent="0" algn="l">
               <a:lnSpc>
                 <a:spcPts val="1600"/>
               </a:lnSpc>
@@ -4894,7 +4631,7 @@
           <a:bodyPr wrap="square" lIns="0" tIns="0" rIns="0" bIns="0" rtlCol="0" anchor="t"/>
           <a:lstStyle/>
           <a:p>
-            <a:pPr algn="l" indent="0" marL="0">
+            <a:pPr marL="0" indent="0" algn="l">
               <a:lnSpc>
                 <a:spcPts val="1550"/>
               </a:lnSpc>
@@ -4963,7 +4700,7 @@
           <a:bodyPr wrap="none" lIns="0" tIns="0" rIns="0" bIns="0" rtlCol="0" anchor="t"/>
           <a:lstStyle/>
           <a:p>
-            <a:pPr algn="l" indent="0" marL="0">
+            <a:pPr marL="0" indent="0" algn="l">
               <a:lnSpc>
                 <a:spcPts val="1600"/>
               </a:lnSpc>
@@ -5005,7 +4742,7 @@
           <a:bodyPr wrap="square" lIns="0" tIns="0" rIns="0" bIns="0" rtlCol="0" anchor="t"/>
           <a:lstStyle/>
           <a:p>
-            <a:pPr algn="l" indent="0" marL="0">
+            <a:pPr marL="0" indent="0" algn="l">
               <a:lnSpc>
                 <a:spcPts val="1550"/>
               </a:lnSpc>
@@ -5072,7 +4809,7 @@
           <a:bodyPr wrap="none" lIns="0" tIns="0" rIns="0" bIns="0" rtlCol="0" anchor="t"/>
           <a:lstStyle/>
           <a:p>
-            <a:pPr algn="l" indent="0" marL="0">
+            <a:pPr marL="0" indent="0" algn="l">
               <a:lnSpc>
                 <a:spcPts val="2450"/>
               </a:lnSpc>
@@ -5114,7 +4851,7 @@
           <a:bodyPr wrap="square" lIns="0" tIns="0" rIns="0" bIns="0" rtlCol="0" anchor="t"/>
           <a:lstStyle/>
           <a:p>
-            <a:pPr algn="l" indent="0" marL="0">
+            <a:pPr marL="0" indent="0" algn="l">
               <a:lnSpc>
                 <a:spcPts val="1050"/>
               </a:lnSpc>
@@ -5205,7 +4942,7 @@
           <a:bodyPr wrap="none" lIns="0" tIns="0" rIns="0" bIns="0" rtlCol="0" anchor="t"/>
           <a:lstStyle/>
           <a:p>
-            <a:pPr algn="l" indent="0" marL="0">
+            <a:pPr marL="0" indent="0" algn="l">
               <a:lnSpc>
                 <a:spcPts val="1050"/>
               </a:lnSpc>
@@ -5247,7 +4984,7 @@
           <a:bodyPr wrap="none" lIns="0" tIns="0" rIns="0" bIns="0" rtlCol="0" anchor="t"/>
           <a:lstStyle/>
           <a:p>
-            <a:pPr algn="l" indent="0" marL="0">
+            <a:pPr marL="0" indent="0" algn="l">
               <a:lnSpc>
                 <a:spcPts val="1050"/>
               </a:lnSpc>
@@ -5311,7 +5048,7 @@
           <a:bodyPr wrap="none" lIns="0" tIns="0" rIns="0" bIns="0" rtlCol="0" anchor="t"/>
           <a:lstStyle/>
           <a:p>
-            <a:pPr algn="l" indent="0" marL="0">
+            <a:pPr marL="0" indent="0" algn="l">
               <a:lnSpc>
                 <a:spcPts val="1050"/>
               </a:lnSpc>
@@ -5353,7 +5090,7 @@
           <a:bodyPr wrap="none" lIns="0" tIns="0" rIns="0" bIns="0" rtlCol="0" anchor="t"/>
           <a:lstStyle/>
           <a:p>
-            <a:pPr algn="l" indent="0" marL="0">
+            <a:pPr marL="0" indent="0" algn="l">
               <a:lnSpc>
                 <a:spcPts val="1050"/>
               </a:lnSpc>
@@ -5417,7 +5154,7 @@
           <a:bodyPr wrap="none" lIns="0" tIns="0" rIns="0" bIns="0" rtlCol="0" anchor="t"/>
           <a:lstStyle/>
           <a:p>
-            <a:pPr algn="l" indent="0" marL="0">
+            <a:pPr marL="0" indent="0" algn="l">
               <a:lnSpc>
                 <a:spcPts val="1050"/>
               </a:lnSpc>
@@ -5459,7 +5196,7 @@
           <a:bodyPr wrap="none" lIns="0" tIns="0" rIns="0" bIns="0" rtlCol="0" anchor="t"/>
           <a:lstStyle/>
           <a:p>
-            <a:pPr algn="l" indent="0" marL="0">
+            <a:pPr marL="0" indent="0" algn="l">
               <a:lnSpc>
                 <a:spcPts val="1050"/>
               </a:lnSpc>
@@ -5523,7 +5260,7 @@
           <a:bodyPr wrap="none" lIns="0" tIns="0" rIns="0" bIns="0" rtlCol="0" anchor="t"/>
           <a:lstStyle/>
           <a:p>
-            <a:pPr algn="l" indent="0" marL="0">
+            <a:pPr marL="0" indent="0" algn="l">
               <a:lnSpc>
                 <a:spcPts val="1050"/>
               </a:lnSpc>
@@ -5565,7 +5302,7 @@
           <a:bodyPr wrap="none" lIns="0" tIns="0" rIns="0" bIns="0" rtlCol="0" anchor="t"/>
           <a:lstStyle/>
           <a:p>
-            <a:pPr algn="l" indent="0" marL="0">
+            <a:pPr marL="0" indent="0" algn="l">
               <a:lnSpc>
                 <a:spcPts val="1050"/>
               </a:lnSpc>
@@ -5629,7 +5366,7 @@
           <a:bodyPr wrap="none" lIns="0" tIns="0" rIns="0" bIns="0" rtlCol="0" anchor="t"/>
           <a:lstStyle/>
           <a:p>
-            <a:pPr algn="l" indent="0" marL="0">
+            <a:pPr marL="0" indent="0" algn="l">
               <a:lnSpc>
                 <a:spcPts val="1050"/>
               </a:lnSpc>
@@ -5671,7 +5408,7 @@
           <a:bodyPr wrap="none" lIns="0" tIns="0" rIns="0" bIns="0" rtlCol="0" anchor="t"/>
           <a:lstStyle/>
           <a:p>
-            <a:pPr algn="l" indent="0" marL="0">
+            <a:pPr marL="0" indent="0" algn="l">
               <a:lnSpc>
                 <a:spcPts val="1050"/>
               </a:lnSpc>
@@ -5735,7 +5472,7 @@
           <a:bodyPr wrap="none" lIns="0" tIns="0" rIns="0" bIns="0" rtlCol="0" anchor="t"/>
           <a:lstStyle/>
           <a:p>
-            <a:pPr algn="l" indent="0" marL="0">
+            <a:pPr marL="0" indent="0" algn="l">
               <a:lnSpc>
                 <a:spcPts val="1050"/>
               </a:lnSpc>
@@ -5777,7 +5514,7 @@
           <a:bodyPr wrap="none" lIns="0" tIns="0" rIns="0" bIns="0" rtlCol="0" anchor="t"/>
           <a:lstStyle/>
           <a:p>
-            <a:pPr algn="l" indent="0" marL="0">
+            <a:pPr marL="0" indent="0" algn="l">
               <a:lnSpc>
                 <a:spcPts val="1050"/>
               </a:lnSpc>
@@ -5841,7 +5578,7 @@
           <a:bodyPr wrap="none" lIns="0" tIns="0" rIns="0" bIns="0" rtlCol="0" anchor="t"/>
           <a:lstStyle/>
           <a:p>
-            <a:pPr algn="l" indent="0" marL="0">
+            <a:pPr marL="0" indent="0" algn="l">
               <a:lnSpc>
                 <a:spcPts val="1050"/>
               </a:lnSpc>
@@ -5883,7 +5620,7 @@
           <a:bodyPr wrap="none" lIns="0" tIns="0" rIns="0" bIns="0" rtlCol="0" anchor="t"/>
           <a:lstStyle/>
           <a:p>
-            <a:pPr algn="l" indent="0" marL="0">
+            <a:pPr marL="0" indent="0" algn="l">
               <a:lnSpc>
                 <a:spcPts val="1050"/>
               </a:lnSpc>
@@ -5947,7 +5684,7 @@
           <a:bodyPr wrap="none" lIns="0" tIns="0" rIns="0" bIns="0" rtlCol="0" anchor="t"/>
           <a:lstStyle/>
           <a:p>
-            <a:pPr algn="l" indent="0" marL="0">
+            <a:pPr marL="0" indent="0" algn="l">
               <a:lnSpc>
                 <a:spcPts val="1050"/>
               </a:lnSpc>
@@ -5989,7 +5726,7 @@
           <a:bodyPr wrap="none" lIns="0" tIns="0" rIns="0" bIns="0" rtlCol="0" anchor="t"/>
           <a:lstStyle/>
           <a:p>
-            <a:pPr algn="l" indent="0" marL="0">
+            <a:pPr marL="0" indent="0" algn="l">
               <a:lnSpc>
                 <a:spcPts val="1050"/>
               </a:lnSpc>
@@ -6053,7 +5790,7 @@
           <a:bodyPr wrap="none" lIns="0" tIns="0" rIns="0" bIns="0" rtlCol="0" anchor="t"/>
           <a:lstStyle/>
           <a:p>
-            <a:pPr algn="l" indent="0" marL="0">
+            <a:pPr marL="0" indent="0" algn="l">
               <a:lnSpc>
                 <a:spcPts val="1050"/>
               </a:lnSpc>
@@ -6095,7 +5832,7 @@
           <a:bodyPr wrap="none" lIns="0" tIns="0" rIns="0" bIns="0" rtlCol="0" anchor="t"/>
           <a:lstStyle/>
           <a:p>
-            <a:pPr algn="l" indent="0" marL="0">
+            <a:pPr marL="0" indent="0" algn="l">
               <a:lnSpc>
                 <a:spcPts val="1050"/>
               </a:lnSpc>
@@ -6159,7 +5896,7 @@
           <a:bodyPr wrap="none" lIns="0" tIns="0" rIns="0" bIns="0" rtlCol="0" anchor="t"/>
           <a:lstStyle/>
           <a:p>
-            <a:pPr algn="l" indent="0" marL="0">
+            <a:pPr marL="0" indent="0" algn="l">
               <a:lnSpc>
                 <a:spcPts val="1050"/>
               </a:lnSpc>
@@ -6201,7 +5938,7 @@
           <a:bodyPr wrap="none" lIns="0" tIns="0" rIns="0" bIns="0" rtlCol="0" anchor="t"/>
           <a:lstStyle/>
           <a:p>
-            <a:pPr algn="l" indent="0" marL="0">
+            <a:pPr marL="0" indent="0" algn="l">
               <a:lnSpc>
                 <a:spcPts val="1050"/>
               </a:lnSpc>
@@ -6265,7 +6002,7 @@
           <a:bodyPr wrap="none" lIns="0" tIns="0" rIns="0" bIns="0" rtlCol="0" anchor="t"/>
           <a:lstStyle/>
           <a:p>
-            <a:pPr algn="l" indent="0" marL="0">
+            <a:pPr marL="0" indent="0" algn="l">
               <a:lnSpc>
                 <a:spcPts val="1050"/>
               </a:lnSpc>
@@ -6307,7 +6044,7 @@
           <a:bodyPr wrap="none" lIns="0" tIns="0" rIns="0" bIns="0" rtlCol="0" anchor="t"/>
           <a:lstStyle/>
           <a:p>
-            <a:pPr algn="l" indent="0" marL="0">
+            <a:pPr marL="0" indent="0" algn="l">
               <a:lnSpc>
                 <a:spcPts val="1050"/>
               </a:lnSpc>
@@ -6371,7 +6108,7 @@
           <a:bodyPr wrap="none" lIns="0" tIns="0" rIns="0" bIns="0" rtlCol="0" anchor="t"/>
           <a:lstStyle/>
           <a:p>
-            <a:pPr algn="l" indent="0" marL="0">
+            <a:pPr marL="0" indent="0" algn="l">
               <a:lnSpc>
                 <a:spcPts val="1050"/>
               </a:lnSpc>
@@ -6413,7 +6150,7 @@
           <a:bodyPr wrap="none" lIns="0" tIns="0" rIns="0" bIns="0" rtlCol="0" anchor="t"/>
           <a:lstStyle/>
           <a:p>
-            <a:pPr algn="l" indent="0" marL="0">
+            <a:pPr marL="0" indent="0" algn="l">
               <a:lnSpc>
                 <a:spcPts val="1050"/>
               </a:lnSpc>
@@ -6477,7 +6214,7 @@
           <a:bodyPr wrap="none" lIns="0" tIns="0" rIns="0" bIns="0" rtlCol="0" anchor="t"/>
           <a:lstStyle/>
           <a:p>
-            <a:pPr algn="l" indent="0" marL="0">
+            <a:pPr marL="0" indent="0" algn="l">
               <a:lnSpc>
                 <a:spcPts val="1050"/>
               </a:lnSpc>
@@ -6519,7 +6256,7 @@
           <a:bodyPr wrap="none" lIns="0" tIns="0" rIns="0" bIns="0" rtlCol="0" anchor="t"/>
           <a:lstStyle/>
           <a:p>
-            <a:pPr algn="l" indent="0" marL="0">
+            <a:pPr marL="0" indent="0" algn="l">
               <a:lnSpc>
                 <a:spcPts val="1050"/>
               </a:lnSpc>
@@ -6583,7 +6320,7 @@
           <a:bodyPr wrap="none" lIns="0" tIns="0" rIns="0" bIns="0" rtlCol="0" anchor="t"/>
           <a:lstStyle/>
           <a:p>
-            <a:pPr algn="l" indent="0" marL="0">
+            <a:pPr marL="0" indent="0" algn="l">
               <a:lnSpc>
                 <a:spcPts val="1050"/>
               </a:lnSpc>
@@ -6625,7 +6362,7 @@
           <a:bodyPr wrap="none" lIns="0" tIns="0" rIns="0" bIns="0" rtlCol="0" anchor="t"/>
           <a:lstStyle/>
           <a:p>
-            <a:pPr algn="l" indent="0" marL="0">
+            <a:pPr marL="0" indent="0" algn="l">
               <a:lnSpc>
                 <a:spcPts val="1050"/>
               </a:lnSpc>
@@ -6689,7 +6426,7 @@
           <a:bodyPr wrap="none" lIns="0" tIns="0" rIns="0" bIns="0" rtlCol="0" anchor="t"/>
           <a:lstStyle/>
           <a:p>
-            <a:pPr algn="l" indent="0" marL="0">
+            <a:pPr marL="0" indent="0" algn="l">
               <a:lnSpc>
                 <a:spcPts val="1050"/>
               </a:lnSpc>
@@ -6731,7 +6468,7 @@
           <a:bodyPr wrap="none" lIns="0" tIns="0" rIns="0" bIns="0" rtlCol="0" anchor="t"/>
           <a:lstStyle/>
           <a:p>
-            <a:pPr algn="l" indent="0" marL="0">
+            <a:pPr marL="0" indent="0" algn="l">
               <a:lnSpc>
                 <a:spcPts val="1050"/>
               </a:lnSpc>
@@ -6795,7 +6532,7 @@
           <a:bodyPr wrap="none" lIns="0" tIns="0" rIns="0" bIns="0" rtlCol="0" anchor="t"/>
           <a:lstStyle/>
           <a:p>
-            <a:pPr algn="l" indent="0" marL="0">
+            <a:pPr marL="0" indent="0" algn="l">
               <a:lnSpc>
                 <a:spcPts val="1050"/>
               </a:lnSpc>
@@ -6837,7 +6574,7 @@
           <a:bodyPr wrap="none" lIns="0" tIns="0" rIns="0" bIns="0" rtlCol="0" anchor="t"/>
           <a:lstStyle/>
           <a:p>
-            <a:pPr algn="l" indent="0" marL="0">
+            <a:pPr marL="0" indent="0" algn="l">
               <a:lnSpc>
                 <a:spcPts val="1050"/>
               </a:lnSpc>
@@ -6885,14 +6622,14 @@
       </p:grpSpPr>
       <p:pic>
         <p:nvPicPr>
-          <p:cNvPr id="2" name="Image 0" descr="preencoded.png">    </p:cNvPr>
+          <p:cNvPr id="2" name="Image 0" descr="preencoded.png"/>
           <p:cNvPicPr>
             <a:picLocks noChangeAspect="1"/>
           </p:cNvPicPr>
           <p:nvPr/>
         </p:nvPicPr>
         <p:blipFill>
-          <a:blip r:embed="rId1"/>
+          <a:blip r:embed="rId3"/>
           <a:stretch>
             <a:fillRect/>
           </a:stretch>
@@ -6928,7 +6665,7 @@
           <a:bodyPr wrap="square" lIns="0" tIns="0" rIns="0" bIns="0" rtlCol="0" anchor="t"/>
           <a:lstStyle/>
           <a:p>
-            <a:pPr algn="l" indent="0" marL="0">
+            <a:pPr marL="0" indent="0" algn="l">
               <a:lnSpc>
                 <a:spcPts val="2650"/>
               </a:lnSpc>
@@ -6970,7 +6707,7 @@
           <a:bodyPr wrap="square" lIns="0" tIns="0" rIns="0" bIns="0" rtlCol="0" anchor="t"/>
           <a:lstStyle/>
           <a:p>
-            <a:pPr algn="l" indent="0" marL="0">
+            <a:pPr marL="0" indent="0" algn="l">
               <a:lnSpc>
                 <a:spcPts val="1150"/>
               </a:lnSpc>
@@ -7022,14 +6759,14 @@
       </p:sp>
       <p:pic>
         <p:nvPicPr>
-          <p:cNvPr id="6" name="Image 1" descr="preencoded.png">    </p:cNvPr>
+          <p:cNvPr id="6" name="Image 1" descr="preencoded.png"/>
           <p:cNvPicPr>
             <a:picLocks noChangeAspect="1"/>
           </p:cNvPicPr>
           <p:nvPr/>
         </p:nvPicPr>
         <p:blipFill>
-          <a:blip r:embed="rId2"/>
+          <a:blip r:embed="rId4"/>
           <a:stretch>
             <a:fillRect/>
           </a:stretch>
@@ -7065,7 +6802,7 @@
           <a:bodyPr wrap="none" lIns="0" tIns="0" rIns="0" bIns="0" rtlCol="0" anchor="t"/>
           <a:lstStyle/>
           <a:p>
-            <a:pPr algn="l" indent="0" marL="0">
+            <a:pPr marL="0" indent="0" algn="l">
               <a:lnSpc>
                 <a:spcPts val="1300"/>
               </a:lnSpc>
@@ -7107,7 +6844,7 @@
           <a:bodyPr wrap="square" lIns="0" tIns="0" rIns="0" bIns="0" rtlCol="0" anchor="t"/>
           <a:lstStyle/>
           <a:p>
-            <a:pPr algn="l" indent="0" marL="0">
+            <a:pPr marL="0" indent="0" algn="l">
               <a:lnSpc>
                 <a:spcPts val="1150"/>
               </a:lnSpc>
@@ -7124,12 +6861,6 @@
               </a:rPr>
               <a:t>Imported pandas and loaded the CSV into a structured DataFrame using </a:t>
             </a:r>
-            <a:pPr algn="l" indent="0" marL="0">
-              <a:lnSpc>
-                <a:spcPts val="1150"/>
-              </a:lnSpc>
-              <a:buNone/>
-            </a:pPr>
             <a:r>
               <a:rPr lang="en-US" sz="800" dirty="0">
                 <a:solidFill>
@@ -7144,12 +6875,6 @@
               </a:rPr>
               <a:t>pd.read_csv()</a:t>
             </a:r>
-            <a:pPr algn="l" indent="0" marL="0">
-              <a:lnSpc>
-                <a:spcPts val="1150"/>
-              </a:lnSpc>
-              <a:buNone/>
-            </a:pPr>
             <a:r>
               <a:rPr lang="en-US" sz="800" dirty="0">
                 <a:solidFill>
@@ -7196,14 +6921,14 @@
       </p:sp>
       <p:pic>
         <p:nvPicPr>
-          <p:cNvPr id="10" name="Image 2" descr="preencoded.png">    </p:cNvPr>
+          <p:cNvPr id="10" name="Image 2" descr="preencoded.png"/>
           <p:cNvPicPr>
             <a:picLocks noChangeAspect="1"/>
           </p:cNvPicPr>
           <p:nvPr/>
         </p:nvPicPr>
         <p:blipFill>
-          <a:blip r:embed="rId3"/>
+          <a:blip r:embed="rId4"/>
           <a:stretch>
             <a:fillRect/>
           </a:stretch>
@@ -7239,7 +6964,7 @@
           <a:bodyPr wrap="none" lIns="0" tIns="0" rIns="0" bIns="0" rtlCol="0" anchor="t"/>
           <a:lstStyle/>
           <a:p>
-            <a:pPr algn="l" indent="0" marL="0">
+            <a:pPr marL="0" indent="0" algn="l">
               <a:lnSpc>
                 <a:spcPts val="1300"/>
               </a:lnSpc>
@@ -7281,7 +7006,7 @@
           <a:bodyPr wrap="square" lIns="0" tIns="0" rIns="0" bIns="0" rtlCol="0" anchor="t"/>
           <a:lstStyle/>
           <a:p>
-            <a:pPr algn="l" indent="0" marL="0">
+            <a:pPr marL="0" indent="0" algn="l">
               <a:lnSpc>
                 <a:spcPts val="1150"/>
               </a:lnSpc>
@@ -7298,12 +7023,6 @@
               </a:rPr>
               <a:t>Used </a:t>
             </a:r>
-            <a:pPr algn="l" indent="0" marL="0">
-              <a:lnSpc>
-                <a:spcPts val="1150"/>
-              </a:lnSpc>
-              <a:buNone/>
-            </a:pPr>
             <a:r>
               <a:rPr lang="en-US" sz="800" dirty="0">
                 <a:solidFill>
@@ -7318,12 +7037,6 @@
               </a:rPr>
               <a:t>df.head()</a:t>
             </a:r>
-            <a:pPr algn="l" indent="0" marL="0">
-              <a:lnSpc>
-                <a:spcPts val="1150"/>
-              </a:lnSpc>
-              <a:buNone/>
-            </a:pPr>
             <a:r>
               <a:rPr lang="en-US" sz="800" dirty="0">
                 <a:solidFill>
@@ -7335,12 +7048,6 @@
               </a:rPr>
               <a:t>, </a:t>
             </a:r>
-            <a:pPr algn="l" indent="0" marL="0">
-              <a:lnSpc>
-                <a:spcPts val="1150"/>
-              </a:lnSpc>
-              <a:buNone/>
-            </a:pPr>
             <a:r>
               <a:rPr lang="en-US" sz="800" dirty="0">
                 <a:solidFill>
@@ -7355,12 +7062,6 @@
               </a:rPr>
               <a:t>df.tail()</a:t>
             </a:r>
-            <a:pPr algn="l" indent="0" marL="0">
-              <a:lnSpc>
-                <a:spcPts val="1150"/>
-              </a:lnSpc>
-              <a:buNone/>
-            </a:pPr>
             <a:r>
               <a:rPr lang="en-US" sz="800" dirty="0">
                 <a:solidFill>
@@ -7372,12 +7073,6 @@
               </a:rPr>
               <a:t>, </a:t>
             </a:r>
-            <a:pPr algn="l" indent="0" marL="0">
-              <a:lnSpc>
-                <a:spcPts val="1150"/>
-              </a:lnSpc>
-              <a:buNone/>
-            </a:pPr>
             <a:r>
               <a:rPr lang="en-US" sz="800" dirty="0">
                 <a:solidFill>
@@ -7392,12 +7087,6 @@
               </a:rPr>
               <a:t>df.describe(include='all')</a:t>
             </a:r>
-            <a:pPr algn="l" indent="0" marL="0">
-              <a:lnSpc>
-                <a:spcPts val="1150"/>
-              </a:lnSpc>
-              <a:buNone/>
-            </a:pPr>
             <a:r>
               <a:rPr lang="en-US" sz="800" dirty="0">
                 <a:solidFill>
@@ -7409,12 +7098,6 @@
               </a:rPr>
               <a:t>, and </a:t>
             </a:r>
-            <a:pPr algn="l" indent="0" marL="0">
-              <a:lnSpc>
-                <a:spcPts val="1150"/>
-              </a:lnSpc>
-              <a:buNone/>
-            </a:pPr>
             <a:r>
               <a:rPr lang="en-US" sz="800" dirty="0">
                 <a:solidFill>
@@ -7429,12 +7112,6 @@
               </a:rPr>
               <a:t>df.info()</a:t>
             </a:r>
-            <a:pPr algn="l" indent="0" marL="0">
-              <a:lnSpc>
-                <a:spcPts val="1150"/>
-              </a:lnSpc>
-              <a:buNone/>
-            </a:pPr>
             <a:r>
               <a:rPr lang="en-US" sz="800" dirty="0">
                 <a:solidFill>
@@ -7481,14 +7158,14 @@
       </p:sp>
       <p:pic>
         <p:nvPicPr>
-          <p:cNvPr id="14" name="Image 3" descr="preencoded.png">    </p:cNvPr>
+          <p:cNvPr id="14" name="Image 3" descr="preencoded.png"/>
           <p:cNvPicPr>
             <a:picLocks noChangeAspect="1"/>
           </p:cNvPicPr>
           <p:nvPr/>
         </p:nvPicPr>
         <p:blipFill>
-          <a:blip r:embed="rId4"/>
+          <a:blip r:embed="rId5"/>
           <a:stretch>
             <a:fillRect/>
           </a:stretch>
@@ -7524,7 +7201,7 @@
           <a:bodyPr wrap="none" lIns="0" tIns="0" rIns="0" bIns="0" rtlCol="0" anchor="t"/>
           <a:lstStyle/>
           <a:p>
-            <a:pPr algn="l" indent="0" marL="0">
+            <a:pPr marL="0" indent="0" algn="l">
               <a:lnSpc>
                 <a:spcPts val="1300"/>
               </a:lnSpc>
@@ -7566,7 +7243,7 @@
           <a:bodyPr wrap="square" lIns="0" tIns="0" rIns="0" bIns="0" rtlCol="0" anchor="t"/>
           <a:lstStyle/>
           <a:p>
-            <a:pPr algn="l" indent="0" marL="0">
+            <a:pPr marL="0" indent="0" algn="l">
               <a:lnSpc>
                 <a:spcPts val="1150"/>
               </a:lnSpc>
@@ -7583,12 +7260,6 @@
               </a:rPr>
               <a:t>Identified inconsistencies between </a:t>
             </a:r>
-            <a:pPr algn="l" indent="0" marL="0">
-              <a:lnSpc>
-                <a:spcPts val="1150"/>
-              </a:lnSpc>
-              <a:buNone/>
-            </a:pPr>
             <a:r>
               <a:rPr lang="en-US" sz="800" b="1" dirty="0">
                 <a:solidFill>
@@ -7600,12 +7271,6 @@
               </a:rPr>
               <a:t>Item Purchased</a:t>
             </a:r>
-            <a:pPr algn="l" indent="0" marL="0">
-              <a:lnSpc>
-                <a:spcPts val="1150"/>
-              </a:lnSpc>
-              <a:buNone/>
-            </a:pPr>
             <a:r>
               <a:rPr lang="en-US" sz="800" dirty="0">
                 <a:solidFill>
@@ -7617,12 +7282,6 @@
               </a:rPr>
               <a:t> and </a:t>
             </a:r>
-            <a:pPr algn="l" indent="0" marL="0">
-              <a:lnSpc>
-                <a:spcPts val="1150"/>
-              </a:lnSpc>
-              <a:buNone/>
-            </a:pPr>
             <a:r>
               <a:rPr lang="en-US" sz="800" b="1" dirty="0">
                 <a:solidFill>
@@ -7634,12 +7293,6 @@
               </a:rPr>
               <a:t>Category</a:t>
             </a:r>
-            <a:pPr algn="l" indent="0" marL="0">
-              <a:lnSpc>
-                <a:spcPts val="1150"/>
-              </a:lnSpc>
-              <a:buNone/>
-            </a:pPr>
             <a:r>
               <a:rPr lang="en-US" sz="800" dirty="0">
                 <a:solidFill>
@@ -7686,14 +7339,14 @@
       </p:sp>
       <p:pic>
         <p:nvPicPr>
-          <p:cNvPr id="18" name="Image 4" descr="preencoded.png">    </p:cNvPr>
+          <p:cNvPr id="18" name="Image 4" descr="preencoded.png"/>
           <p:cNvPicPr>
             <a:picLocks noChangeAspect="1"/>
           </p:cNvPicPr>
           <p:nvPr/>
         </p:nvPicPr>
         <p:blipFill>
-          <a:blip r:embed="rId5"/>
+          <a:blip r:embed="rId4"/>
           <a:stretch>
             <a:fillRect/>
           </a:stretch>
@@ -7729,7 +7382,7 @@
           <a:bodyPr wrap="none" lIns="0" tIns="0" rIns="0" bIns="0" rtlCol="0" anchor="t"/>
           <a:lstStyle/>
           <a:p>
-            <a:pPr algn="l" indent="0" marL="0">
+            <a:pPr marL="0" indent="0" algn="l">
               <a:lnSpc>
                 <a:spcPts val="1300"/>
               </a:lnSpc>
@@ -7771,7 +7424,7 @@
           <a:bodyPr wrap="square" lIns="0" tIns="0" rIns="0" bIns="0" rtlCol="0" anchor="t"/>
           <a:lstStyle/>
           <a:p>
-            <a:pPr algn="l" indent="0" marL="0">
+            <a:pPr marL="0" indent="0" algn="l">
               <a:lnSpc>
                 <a:spcPts val="1150"/>
               </a:lnSpc>
@@ -7788,12 +7441,6 @@
               </a:rPr>
               <a:t>Renamed all columns to lowercase with underscores using </a:t>
             </a:r>
-            <a:pPr algn="l" indent="0" marL="0">
-              <a:lnSpc>
-                <a:spcPts val="1150"/>
-              </a:lnSpc>
-              <a:buNone/>
-            </a:pPr>
             <a:r>
               <a:rPr lang="en-US" sz="800" dirty="0">
                 <a:solidFill>
@@ -7808,12 +7455,6 @@
               </a:rPr>
               <a:t>str.replace(" ", "_")</a:t>
             </a:r>
-            <a:pPr algn="l" indent="0" marL="0">
-              <a:lnSpc>
-                <a:spcPts val="1150"/>
-              </a:lnSpc>
-              <a:buNone/>
-            </a:pPr>
             <a:r>
               <a:rPr lang="en-US" sz="800" dirty="0">
                 <a:solidFill>
@@ -7825,12 +7466,6 @@
               </a:rPr>
               <a:t> and </a:t>
             </a:r>
-            <a:pPr algn="l" indent="0" marL="0">
-              <a:lnSpc>
-                <a:spcPts val="1150"/>
-              </a:lnSpc>
-              <a:buNone/>
-            </a:pPr>
             <a:r>
               <a:rPr lang="en-US" sz="800" dirty="0">
                 <a:solidFill>
@@ -7845,12 +7480,6 @@
               </a:rPr>
               <a:t>str.lower()</a:t>
             </a:r>
-            <a:pPr algn="l" indent="0" marL="0">
-              <a:lnSpc>
-                <a:spcPts val="1150"/>
-              </a:lnSpc>
-              <a:buNone/>
-            </a:pPr>
             <a:r>
               <a:rPr lang="en-US" sz="800" dirty="0">
                 <a:solidFill>
@@ -7912,7 +7541,7 @@
           <a:bodyPr wrap="none" lIns="0" tIns="0" rIns="0" bIns="0" rtlCol="0" anchor="t"/>
           <a:lstStyle/>
           <a:p>
-            <a:pPr algn="l" indent="0" marL="0">
+            <a:pPr marL="0" indent="0" algn="l">
               <a:lnSpc>
                 <a:spcPts val="3050"/>
               </a:lnSpc>
@@ -7954,7 +7583,7 @@
           <a:bodyPr wrap="square" lIns="0" tIns="0" rIns="0" bIns="0" rtlCol="0" anchor="t"/>
           <a:lstStyle/>
           <a:p>
-            <a:pPr algn="l" indent="0" marL="0">
+            <a:pPr marL="0" indent="0" algn="l">
               <a:lnSpc>
                 <a:spcPts val="1450"/>
               </a:lnSpc>
@@ -7971,12 +7600,6 @@
               </a:rPr>
               <a:t>Missing values were addressed with </a:t>
             </a:r>
-            <a:pPr algn="l" indent="0" marL="0">
-              <a:lnSpc>
-                <a:spcPts val="1450"/>
-              </a:lnSpc>
-              <a:buNone/>
-            </a:pPr>
             <a:r>
               <a:rPr lang="en-US" sz="900" b="1" dirty="0">
                 <a:solidFill>
@@ -7988,12 +7611,6 @@
               </a:rPr>
               <a:t>category-specific business logic</a:t>
             </a:r>
-            <a:pPr algn="l" indent="0" marL="0">
-              <a:lnSpc>
-                <a:spcPts val="1450"/>
-              </a:lnSpc>
-              <a:buNone/>
-            </a:pPr>
             <a:r>
               <a:rPr lang="en-US" sz="900" dirty="0">
                 <a:solidFill>
@@ -8011,17 +7628,17 @@
       </p:sp>
       <p:pic>
         <p:nvPicPr>
-          <p:cNvPr id="4" name="Image 0" descr="preencoded.png">    </p:cNvPr>
+          <p:cNvPr id="4" name="Image 0" descr="preencoded.png"/>
           <p:cNvPicPr>
             <a:picLocks noChangeAspect="1"/>
           </p:cNvPicPr>
           <p:nvPr/>
         </p:nvPicPr>
         <p:blipFill>
-          <a:blip r:embed="rId1">
+          <a:blip>
             <a:extLst>
               <a:ext uri="{96DAC541-7B7A-43D3-8B79-37D633B846F1}">
-                <asvg:svgBlip xmlns:asvg="http://schemas.microsoft.com/office/drawing/2016/SVG/main" r:embed="rId2"/>
+                <asvg:svgBlip xmlns:asvg="http://schemas.microsoft.com/office/drawing/2016/SVG/main" r:embed="rId3"/>
               </a:ext>
             </a:extLst>
           </a:blip>
@@ -8060,7 +7677,7 @@
           <a:bodyPr wrap="none" lIns="0" tIns="0" rIns="0" bIns="0" rtlCol="0" anchor="t"/>
           <a:lstStyle/>
           <a:p>
-            <a:pPr algn="l" indent="0" marL="0">
+            <a:pPr marL="0" indent="0" algn="l">
               <a:lnSpc>
                 <a:spcPts val="1500"/>
               </a:lnSpc>
@@ -8102,7 +7719,7 @@
           <a:bodyPr wrap="square" lIns="0" tIns="0" rIns="0" bIns="0" rtlCol="0" anchor="t"/>
           <a:lstStyle/>
           <a:p>
-            <a:pPr algn="l" indent="0" marL="0">
+            <a:pPr marL="0" indent="0" algn="l">
               <a:lnSpc>
                 <a:spcPts val="1450"/>
               </a:lnSpc>
@@ -8119,12 +7736,6 @@
               </a:rPr>
               <a:t>Electronics &amp; Accessories → </a:t>
             </a:r>
-            <a:pPr algn="l" indent="0" marL="0">
-              <a:lnSpc>
-                <a:spcPts val="1450"/>
-              </a:lnSpc>
-              <a:buNone/>
-            </a:pPr>
             <a:r>
               <a:rPr lang="en-US" sz="900" b="1" dirty="0">
                 <a:solidFill>
@@ -8136,12 +7747,6 @@
               </a:rPr>
               <a:t>NA</a:t>
             </a:r>
-            <a:pPr algn="l" indent="0" marL="0">
-              <a:lnSpc>
-                <a:spcPts val="1450"/>
-              </a:lnSpc>
-              <a:buNone/>
-            </a:pPr>
             <a:r>
               <a:rPr lang="en-US" sz="900" dirty="0">
                 <a:solidFill>
@@ -8153,12 +7758,6 @@
               </a:rPr>
               <a:t> (no size). Clothing → filled with </a:t>
             </a:r>
-            <a:pPr algn="l" indent="0" marL="0">
-              <a:lnSpc>
-                <a:spcPts val="1450"/>
-              </a:lnSpc>
-              <a:buNone/>
-            </a:pPr>
             <a:r>
               <a:rPr lang="en-US" sz="900" b="1" dirty="0">
                 <a:solidFill>
@@ -8170,12 +7769,6 @@
               </a:rPr>
               <a:t>mode</a:t>
             </a:r>
-            <a:pPr algn="l" indent="0" marL="0">
-              <a:lnSpc>
-                <a:spcPts val="1450"/>
-              </a:lnSpc>
-              <a:buNone/>
-            </a:pPr>
             <a:r>
               <a:rPr lang="en-US" sz="900" dirty="0">
                 <a:solidFill>
@@ -8187,12 +7780,6 @@
               </a:rPr>
               <a:t>. Footwear → </a:t>
             </a:r>
-            <a:pPr algn="l" indent="0" marL="0">
-              <a:lnSpc>
-                <a:spcPts val="1450"/>
-              </a:lnSpc>
-              <a:buNone/>
-            </a:pPr>
             <a:r>
               <a:rPr lang="en-US" sz="900" b="1" dirty="0">
                 <a:solidFill>
@@ -8204,12 +7791,6 @@
               </a:rPr>
               <a:t>Free Size</a:t>
             </a:r>
-            <a:pPr algn="l" indent="0" marL="0">
-              <a:lnSpc>
-                <a:spcPts val="1450"/>
-              </a:lnSpc>
-              <a:buNone/>
-            </a:pPr>
             <a:r>
               <a:rPr lang="en-US" sz="900" dirty="0">
                 <a:solidFill>
@@ -8227,14 +7808,14 @@
       </p:sp>
       <p:pic>
         <p:nvPicPr>
-          <p:cNvPr id="7" name="Image 1" descr="preencoded.png">    </p:cNvPr>
+          <p:cNvPr id="7" name="Image 1" descr="preencoded.png"/>
           <p:cNvPicPr>
             <a:picLocks noChangeAspect="1"/>
           </p:cNvPicPr>
           <p:nvPr/>
         </p:nvPicPr>
         <p:blipFill>
-          <a:blip r:embed="rId3">
+          <a:blip>
             <a:extLst>
               <a:ext uri="{96DAC541-7B7A-43D3-8B79-37D633B846F1}">
                 <asvg:svgBlip xmlns:asvg="http://schemas.microsoft.com/office/drawing/2016/SVG/main" r:embed="rId4"/>
@@ -8276,7 +7857,7 @@
           <a:bodyPr wrap="none" lIns="0" tIns="0" rIns="0" bIns="0" rtlCol="0" anchor="t"/>
           <a:lstStyle/>
           <a:p>
-            <a:pPr algn="l" indent="0" marL="0">
+            <a:pPr marL="0" indent="0" algn="l">
               <a:lnSpc>
                 <a:spcPts val="1500"/>
               </a:lnSpc>
@@ -8318,7 +7899,7 @@
           <a:bodyPr wrap="square" lIns="0" tIns="0" rIns="0" bIns="0" rtlCol="0" anchor="t"/>
           <a:lstStyle/>
           <a:p>
-            <a:pPr algn="l" indent="0" marL="0">
+            <a:pPr marL="0" indent="0" algn="l">
               <a:lnSpc>
                 <a:spcPts val="1450"/>
               </a:lnSpc>
@@ -8335,12 +7916,6 @@
               </a:rPr>
               <a:t>Missing ratings were imputed using the </a:t>
             </a:r>
-            <a:pPr algn="l" indent="0" marL="0">
-              <a:lnSpc>
-                <a:spcPts val="1450"/>
-              </a:lnSpc>
-              <a:buNone/>
-            </a:pPr>
             <a:r>
               <a:rPr lang="en-US" sz="900" b="1" dirty="0">
                 <a:solidFill>
@@ -8352,12 +7927,6 @@
               </a:rPr>
               <a:t>product-level mean</a:t>
             </a:r>
-            <a:pPr algn="l" indent="0" marL="0">
-              <a:lnSpc>
-                <a:spcPts val="1450"/>
-              </a:lnSpc>
-              <a:buNone/>
-            </a:pPr>
             <a:r>
               <a:rPr lang="en-US" sz="900" dirty="0">
                 <a:solidFill>
@@ -8375,14 +7944,150 @@
       </p:sp>
       <p:pic>
         <p:nvPicPr>
-          <p:cNvPr id="10" name="Image 2" descr="preencoded.png">    </p:cNvPr>
+          <p:cNvPr id="10" name="Image 2" descr="preencoded.png"/>
           <p:cNvPicPr>
             <a:picLocks noChangeAspect="1"/>
           </p:cNvPicPr>
           <p:nvPr/>
         </p:nvPicPr>
         <p:blipFill>
-          <a:blip r:embed="rId5">
+          <a:blip>
+            <a:extLst>
+              <a:ext uri="{96DAC541-7B7A-43D3-8B79-37D633B846F1}">
+                <asvg:svgBlip xmlns:asvg="http://schemas.microsoft.com/office/drawing/2016/SVG/main" r:embed="rId5"/>
+              </a:ext>
+            </a:extLst>
+          </a:blip>
+          <a:stretch>
+            <a:fillRect/>
+          </a:stretch>
+        </p:blipFill>
+        <p:spPr>
+          <a:xfrm>
+            <a:off x="472901" y="2932063"/>
+            <a:ext cx="295573" cy="295573"/>
+          </a:xfrm>
+          <a:prstGeom prst="rect">
+            <a:avLst/>
+          </a:prstGeom>
+        </p:spPr>
+      </p:pic>
+      <p:sp>
+        <p:nvSpPr>
+          <p:cNvPr id="11" name="Text 6"/>
+          <p:cNvSpPr/>
+          <p:nvPr/>
+        </p:nvSpPr>
+        <p:spPr>
+          <a:xfrm>
+            <a:off x="472901" y="3368427"/>
+            <a:ext cx="1551756" cy="193923"/>
+          </a:xfrm>
+          <a:prstGeom prst="rect">
+            <a:avLst/>
+          </a:prstGeom>
+          <a:noFill/>
+          <a:ln/>
+        </p:spPr>
+        <p:txBody>
+          <a:bodyPr wrap="none" lIns="0" tIns="0" rIns="0" bIns="0" rtlCol="0" anchor="t"/>
+          <a:lstStyle/>
+          <a:p>
+            <a:pPr marL="0" indent="0" algn="l">
+              <a:lnSpc>
+                <a:spcPts val="1500"/>
+              </a:lnSpc>
+              <a:buNone/>
+            </a:pPr>
+            <a:r>
+              <a:rPr lang="en-US" sz="1200" b="1" dirty="0">
+                <a:solidFill>
+                  <a:srgbClr val="E0D6DE"/>
+                </a:solidFill>
+                <a:latin typeface="Petrona Bold" pitchFamily="34" charset="0"/>
+                <a:ea typeface="Petrona Bold" pitchFamily="34" charset="-122"/>
+                <a:cs typeface="Petrona Bold" pitchFamily="34" charset="-120"/>
+              </a:rPr>
+              <a:t>Purchase Amount</a:t>
+            </a:r>
+            <a:endParaRPr lang="en-US" sz="1200" dirty="0"/>
+          </a:p>
+        </p:txBody>
+      </p:sp>
+      <p:sp>
+        <p:nvSpPr>
+          <p:cNvPr id="12" name="Text 7"/>
+          <p:cNvSpPr/>
+          <p:nvPr/>
+        </p:nvSpPr>
+        <p:spPr>
+          <a:xfrm>
+            <a:off x="472901" y="3629918"/>
+            <a:ext cx="4028703" cy="369391"/>
+          </a:xfrm>
+          <a:prstGeom prst="rect">
+            <a:avLst/>
+          </a:prstGeom>
+          <a:noFill/>
+          <a:ln/>
+        </p:spPr>
+        <p:txBody>
+          <a:bodyPr wrap="square" lIns="0" tIns="0" rIns="0" bIns="0" rtlCol="0" anchor="t"/>
+          <a:lstStyle/>
+          <a:p>
+            <a:pPr marL="0" indent="0" algn="l">
+              <a:lnSpc>
+                <a:spcPts val="1450"/>
+              </a:lnSpc>
+              <a:buNone/>
+            </a:pPr>
+            <a:r>
+              <a:rPr lang="en-US" sz="900" dirty="0">
+                <a:solidFill>
+                  <a:srgbClr val="E0D6DE"/>
+                </a:solidFill>
+                <a:latin typeface="Inter" pitchFamily="34" charset="0"/>
+                <a:ea typeface="Inter" pitchFamily="34" charset="-122"/>
+                <a:cs typeface="Inter" pitchFamily="34" charset="-120"/>
+              </a:rPr>
+              <a:t>Missing values replaced with the </a:t>
+            </a:r>
+            <a:r>
+              <a:rPr lang="en-US" sz="900" b="1" dirty="0">
+                <a:solidFill>
+                  <a:srgbClr val="E0D6DE"/>
+                </a:solidFill>
+                <a:latin typeface="Inter" pitchFamily="34" charset="0"/>
+                <a:ea typeface="Inter" pitchFamily="34" charset="-122"/>
+                <a:cs typeface="Inter" pitchFamily="34" charset="-120"/>
+              </a:rPr>
+              <a:t>mean value</a:t>
+            </a:r>
+            <a:r>
+              <a:rPr lang="en-US" sz="900" dirty="0">
+                <a:solidFill>
+                  <a:srgbClr val="E0D6DE"/>
+                </a:solidFill>
+                <a:latin typeface="Inter" pitchFamily="34" charset="0"/>
+                <a:ea typeface="Inter" pitchFamily="34" charset="-122"/>
+                <a:cs typeface="Inter" pitchFamily="34" charset="-120"/>
+              </a:rPr>
+              <a:t> to maintain product-level pricing consistency and avoid distortion in revenue calculations.</a:t>
+            </a:r>
+            <a:endParaRPr lang="en-US" sz="900" dirty="0"/>
+          </a:p>
+        </p:txBody>
+      </p:sp>
+      <p:pic>
+        <p:nvPicPr>
+          <p:cNvPr id="13" name="Image 3" descr="preencoded.png"/>
+          <p:cNvPicPr>
+            <a:picLocks noChangeAspect="1"/>
+          </p:cNvPicPr>
+          <p:nvPr/>
+        </p:nvPicPr>
+        <p:blipFill>
+          <a:blip>
             <a:extLst>
               <a:ext uri="{96DAC541-7B7A-43D3-8B79-37D633B846F1}">
                 <asvg:svgBlip xmlns:asvg="http://schemas.microsoft.com/office/drawing/2016/SVG/main" r:embed="rId6"/>
@@ -8395,7 +8100,7 @@
         </p:blipFill>
         <p:spPr>
           <a:xfrm>
-            <a:off x="472901" y="2932063"/>
+            <a:off x="4642396" y="2932063"/>
             <a:ext cx="295573" cy="295573"/>
           </a:xfrm>
           <a:prstGeom prst="rect">
@@ -8405,13 +8110,13 @@
       </p:pic>
       <p:sp>
         <p:nvSpPr>
-          <p:cNvPr id="11" name="Text 6"/>
-          <p:cNvSpPr/>
-          <p:nvPr/>
-        </p:nvSpPr>
-        <p:spPr>
-          <a:xfrm>
-            <a:off x="472901" y="3368427"/>
+          <p:cNvPr id="14" name="Text 8"/>
+          <p:cNvSpPr/>
+          <p:nvPr/>
+        </p:nvSpPr>
+        <p:spPr>
+          <a:xfrm>
+            <a:off x="4642396" y="3368427"/>
             <a:ext cx="1551756" cy="193923"/>
           </a:xfrm>
           <a:prstGeom prst="rect">
@@ -8424,7 +8129,7 @@
           <a:bodyPr wrap="none" lIns="0" tIns="0" rIns="0" bIns="0" rtlCol="0" anchor="t"/>
           <a:lstStyle/>
           <a:p>
-            <a:pPr algn="l" indent="0" marL="0">
+            <a:pPr marL="0" indent="0" algn="l">
               <a:lnSpc>
                 <a:spcPts val="1500"/>
               </a:lnSpc>
@@ -8439,7 +8144,7 @@
                 <a:ea typeface="Petrona Bold" pitchFamily="34" charset="-122"/>
                 <a:cs typeface="Petrona Bold" pitchFamily="34" charset="-120"/>
               </a:rPr>
-              <a:t>Purchase Amount</a:t>
+              <a:t>Previous Purchases</a:t>
             </a:r>
             <a:endParaRPr lang="en-US" sz="1200" dirty="0"/>
           </a:p>
@@ -8447,13 +8152,13 @@
       </p:sp>
       <p:sp>
         <p:nvSpPr>
-          <p:cNvPr id="12" name="Text 7"/>
-          <p:cNvSpPr/>
-          <p:nvPr/>
-        </p:nvSpPr>
-        <p:spPr>
-          <a:xfrm>
-            <a:off x="472901" y="3629918"/>
+          <p:cNvPr id="15" name="Text 9"/>
+          <p:cNvSpPr/>
+          <p:nvPr/>
+        </p:nvSpPr>
+        <p:spPr>
+          <a:xfrm>
+            <a:off x="4642396" y="3629918"/>
             <a:ext cx="4028703" cy="369391"/>
           </a:xfrm>
           <a:prstGeom prst="rect">
@@ -8466,7 +8171,7 @@
           <a:bodyPr wrap="square" lIns="0" tIns="0" rIns="0" bIns="0" rtlCol="0" anchor="t"/>
           <a:lstStyle/>
           <a:p>
-            <a:pPr algn="l" indent="0" marL="0">
+            <a:pPr marL="0" indent="0" algn="l">
               <a:lnSpc>
                 <a:spcPts val="1450"/>
               </a:lnSpc>
@@ -8481,14 +8186,8 @@
                 <a:ea typeface="Inter" pitchFamily="34" charset="-122"/>
                 <a:cs typeface="Inter" pitchFamily="34" charset="-120"/>
               </a:rPr>
-              <a:t>Missing values replaced with the </a:t>
-            </a:r>
-            <a:pPr algn="l" indent="0" marL="0">
-              <a:lnSpc>
-                <a:spcPts val="1450"/>
-              </a:lnSpc>
-              <a:buNone/>
-            </a:pPr>
+              <a:t>Missing values replaced with </a:t>
+            </a:r>
             <a:r>
               <a:rPr lang="en-US" sz="900" b="1" dirty="0">
                 <a:solidFill>
@@ -8498,14 +8197,8 @@
                 <a:ea typeface="Inter" pitchFamily="34" charset="-122"/>
                 <a:cs typeface="Inter" pitchFamily="34" charset="-120"/>
               </a:rPr>
-              <a:t>mean value</a:t>
-            </a:r>
-            <a:pPr algn="l" indent="0" marL="0">
-              <a:lnSpc>
-                <a:spcPts val="1450"/>
-              </a:lnSpc>
-              <a:buNone/>
-            </a:pPr>
+              <a:t>0</a:t>
+            </a:r>
             <a:r>
               <a:rPr lang="en-US" sz="900" dirty="0">
                 <a:solidFill>
@@ -8515,198 +8208,50 @@
                 <a:ea typeface="Inter" pitchFamily="34" charset="-122"/>
                 <a:cs typeface="Inter" pitchFamily="34" charset="-120"/>
               </a:rPr>
-              <a:t> to maintain product-level pricing consistency and avoid distortion in revenue calculations.</a:t>
+              <a:t> — logically representing customers with no purchase history, critical for segmentation and loyalty analysis.</a:t>
             </a:r>
             <a:endParaRPr lang="en-US" sz="900" dirty="0"/>
           </a:p>
         </p:txBody>
+      </p:sp>
+      <p:sp>
+        <p:nvSpPr>
+          <p:cNvPr id="16" name="Shape 10"/>
+          <p:cNvSpPr/>
+          <p:nvPr/>
+        </p:nvSpPr>
+        <p:spPr>
+          <a:xfrm>
+            <a:off x="472901" y="4126037"/>
+            <a:ext cx="8198197" cy="672033"/>
+          </a:xfrm>
+          <a:prstGeom prst="roundRect">
+            <a:avLst>
+              <a:gd name="adj" fmla="val 7389"/>
+            </a:avLst>
+          </a:prstGeom>
+          <a:solidFill>
+            <a:srgbClr val="1C113B"/>
+          </a:solidFill>
+          <a:ln/>
+        </p:spPr>
       </p:sp>
       <p:pic>
         <p:nvPicPr>
-          <p:cNvPr id="13" name="Image 3" descr="preencoded.png">    </p:cNvPr>
+          <p:cNvPr id="17" name="Image 4" descr="preencoded.png"/>
           <p:cNvPicPr>
             <a:picLocks noChangeAspect="1"/>
           </p:cNvPicPr>
           <p:nvPr/>
         </p:nvPicPr>
         <p:blipFill>
-          <a:blip r:embed="rId7">
-            <a:extLst>
-              <a:ext uri="{96DAC541-7B7A-43D3-8B79-37D633B846F1}">
-                <asvg:svgBlip xmlns:asvg="http://schemas.microsoft.com/office/drawing/2016/SVG/main" r:embed="rId8"/>
-              </a:ext>
-            </a:extLst>
-          </a:blip>
+          <a:blip r:embed="rId7"/>
           <a:stretch>
             <a:fillRect/>
           </a:stretch>
         </p:blipFill>
         <p:spPr>
           <a:xfrm>
-            <a:off x="4642396" y="2932063"/>
-            <a:ext cx="295573" cy="295573"/>
-          </a:xfrm>
-          <a:prstGeom prst="rect">
-            <a:avLst/>
-          </a:prstGeom>
-        </p:spPr>
-      </p:pic>
-      <p:sp>
-        <p:nvSpPr>
-          <p:cNvPr id="14" name="Text 8"/>
-          <p:cNvSpPr/>
-          <p:nvPr/>
-        </p:nvSpPr>
-        <p:spPr>
-          <a:xfrm>
-            <a:off x="4642396" y="3368427"/>
-            <a:ext cx="1551756" cy="193923"/>
-          </a:xfrm>
-          <a:prstGeom prst="rect">
-            <a:avLst/>
-          </a:prstGeom>
-          <a:noFill/>
-          <a:ln/>
-        </p:spPr>
-        <p:txBody>
-          <a:bodyPr wrap="none" lIns="0" tIns="0" rIns="0" bIns="0" rtlCol="0" anchor="t"/>
-          <a:lstStyle/>
-          <a:p>
-            <a:pPr algn="l" indent="0" marL="0">
-              <a:lnSpc>
-                <a:spcPts val="1500"/>
-              </a:lnSpc>
-              <a:buNone/>
-            </a:pPr>
-            <a:r>
-              <a:rPr lang="en-US" sz="1200" b="1" dirty="0">
-                <a:solidFill>
-                  <a:srgbClr val="E0D6DE"/>
-                </a:solidFill>
-                <a:latin typeface="Petrona Bold" pitchFamily="34" charset="0"/>
-                <a:ea typeface="Petrona Bold" pitchFamily="34" charset="-122"/>
-                <a:cs typeface="Petrona Bold" pitchFamily="34" charset="-120"/>
-              </a:rPr>
-              <a:t>Previous Purchases</a:t>
-            </a:r>
-            <a:endParaRPr lang="en-US" sz="1200" dirty="0"/>
-          </a:p>
-        </p:txBody>
-      </p:sp>
-      <p:sp>
-        <p:nvSpPr>
-          <p:cNvPr id="15" name="Text 9"/>
-          <p:cNvSpPr/>
-          <p:nvPr/>
-        </p:nvSpPr>
-        <p:spPr>
-          <a:xfrm>
-            <a:off x="4642396" y="3629918"/>
-            <a:ext cx="4028703" cy="369391"/>
-          </a:xfrm>
-          <a:prstGeom prst="rect">
-            <a:avLst/>
-          </a:prstGeom>
-          <a:noFill/>
-          <a:ln/>
-        </p:spPr>
-        <p:txBody>
-          <a:bodyPr wrap="square" lIns="0" tIns="0" rIns="0" bIns="0" rtlCol="0" anchor="t"/>
-          <a:lstStyle/>
-          <a:p>
-            <a:pPr algn="l" indent="0" marL="0">
-              <a:lnSpc>
-                <a:spcPts val="1450"/>
-              </a:lnSpc>
-              <a:buNone/>
-            </a:pPr>
-            <a:r>
-              <a:rPr lang="en-US" sz="900" dirty="0">
-                <a:solidFill>
-                  <a:srgbClr val="E0D6DE"/>
-                </a:solidFill>
-                <a:latin typeface="Inter" pitchFamily="34" charset="0"/>
-                <a:ea typeface="Inter" pitchFamily="34" charset="-122"/>
-                <a:cs typeface="Inter" pitchFamily="34" charset="-120"/>
-              </a:rPr>
-              <a:t>Missing values replaced with </a:t>
-            </a:r>
-            <a:pPr algn="l" indent="0" marL="0">
-              <a:lnSpc>
-                <a:spcPts val="1450"/>
-              </a:lnSpc>
-              <a:buNone/>
-            </a:pPr>
-            <a:r>
-              <a:rPr lang="en-US" sz="900" b="1" dirty="0">
-                <a:solidFill>
-                  <a:srgbClr val="E0D6DE"/>
-                </a:solidFill>
-                <a:latin typeface="Inter" pitchFamily="34" charset="0"/>
-                <a:ea typeface="Inter" pitchFamily="34" charset="-122"/>
-                <a:cs typeface="Inter" pitchFamily="34" charset="-120"/>
-              </a:rPr>
-              <a:t>0</a:t>
-            </a:r>
-            <a:pPr algn="l" indent="0" marL="0">
-              <a:lnSpc>
-                <a:spcPts val="1450"/>
-              </a:lnSpc>
-              <a:buNone/>
-            </a:pPr>
-            <a:r>
-              <a:rPr lang="en-US" sz="900" dirty="0">
-                <a:solidFill>
-                  <a:srgbClr val="E0D6DE"/>
-                </a:solidFill>
-                <a:latin typeface="Inter" pitchFamily="34" charset="0"/>
-                <a:ea typeface="Inter" pitchFamily="34" charset="-122"/>
-                <a:cs typeface="Inter" pitchFamily="34" charset="-120"/>
-              </a:rPr>
-              <a:t> — logically representing customers with no purchase history, critical for segmentation and loyalty analysis.</a:t>
-            </a:r>
-            <a:endParaRPr lang="en-US" sz="900" dirty="0"/>
-          </a:p>
-        </p:txBody>
-      </p:sp>
-      <p:sp>
-        <p:nvSpPr>
-          <p:cNvPr id="16" name="Shape 10"/>
-          <p:cNvSpPr/>
-          <p:nvPr/>
-        </p:nvSpPr>
-        <p:spPr>
-          <a:xfrm>
-            <a:off x="472901" y="4126037"/>
-            <a:ext cx="8198197" cy="672033"/>
-          </a:xfrm>
-          <a:prstGeom prst="roundRect">
-            <a:avLst>
-              <a:gd name="adj" fmla="val 7389"/>
-            </a:avLst>
-          </a:prstGeom>
-          <a:solidFill>
-            <a:srgbClr val="1C113B"/>
-          </a:solidFill>
-          <a:ln/>
-        </p:spPr>
-      </p:sp>
-      <p:pic>
-        <p:nvPicPr>
-          <p:cNvPr id="17" name="Image 4" descr="preencoded.png">    </p:cNvPr>
-          <p:cNvPicPr>
-            <a:picLocks noChangeAspect="1"/>
-          </p:cNvPicPr>
-          <p:nvPr/>
-        </p:nvPicPr>
-        <p:blipFill>
-          <a:blip r:embed="rId9"/>
-          <a:stretch>
-            <a:fillRect/>
-          </a:stretch>
-        </p:blipFill>
-        <p:spPr>
-          <a:xfrm>
             <a:off x="591071" y="4303663"/>
             <a:ext cx="147786" cy="118170"/>
           </a:xfrm>
@@ -8736,7 +8281,7 @@
           <a:bodyPr wrap="square" lIns="0" tIns="0" rIns="0" bIns="0" rtlCol="0" anchor="t"/>
           <a:lstStyle/>
           <a:p>
-            <a:pPr algn="l" indent="0" marL="0">
+            <a:pPr marL="0" indent="0" algn="l">
               <a:lnSpc>
                 <a:spcPts val="1450"/>
               </a:lnSpc>
@@ -8753,12 +8298,6 @@
               </a:rPr>
               <a:t>Duplicates were identified using </a:t>
             </a:r>
-            <a:pPr algn="l" indent="0" marL="0">
-              <a:lnSpc>
-                <a:spcPts val="1450"/>
-              </a:lnSpc>
-              <a:buNone/>
-            </a:pPr>
             <a:r>
               <a:rPr lang="en-US" sz="900" b="1" dirty="0">
                 <a:solidFill>
@@ -8770,12 +8309,6 @@
               </a:rPr>
               <a:t>Customer ID</a:t>
             </a:r>
-            <a:pPr algn="l" indent="0" marL="0">
-              <a:lnSpc>
-                <a:spcPts val="1450"/>
-              </a:lnSpc>
-              <a:buNone/>
-            </a:pPr>
             <a:r>
               <a:rPr lang="en-US" sz="900" dirty="0">
                 <a:solidFill>
@@ -8837,7 +8370,7 @@
           <a:bodyPr wrap="none" lIns="0" tIns="0" rIns="0" bIns="0" rtlCol="0" anchor="t"/>
           <a:lstStyle/>
           <a:p>
-            <a:pPr algn="l" indent="0" marL="0">
+            <a:pPr marL="0" indent="0" algn="l">
               <a:lnSpc>
                 <a:spcPts val="3000"/>
               </a:lnSpc>
@@ -8879,7 +8412,7 @@
           <a:bodyPr wrap="square" lIns="0" tIns="0" rIns="0" bIns="0" rtlCol="0" anchor="t"/>
           <a:lstStyle/>
           <a:p>
-            <a:pPr algn="l" indent="0" marL="0">
+            <a:pPr marL="0" indent="0" algn="l">
               <a:lnSpc>
                 <a:spcPts val="1400"/>
               </a:lnSpc>
@@ -8921,7 +8454,7 @@
           <a:bodyPr wrap="none" lIns="0" tIns="0" rIns="0" bIns="0" rtlCol="0" anchor="t"/>
           <a:lstStyle/>
           <a:p>
-            <a:pPr algn="l" indent="0" marL="0">
+            <a:pPr marL="0" indent="0" algn="l">
               <a:lnSpc>
                 <a:spcPts val="1500"/>
               </a:lnSpc>
@@ -8944,14 +8477,14 @@
       </p:sp>
       <p:pic>
         <p:nvPicPr>
-          <p:cNvPr id="5" name="Image 0" descr="preencoded.png">    </p:cNvPr>
+          <p:cNvPr id="5" name="Image 0" descr="preencoded.png"/>
           <p:cNvPicPr>
             <a:picLocks noChangeAspect="1"/>
           </p:cNvPicPr>
           <p:nvPr/>
         </p:nvPicPr>
         <p:blipFill>
-          <a:blip r:embed="rId1"/>
+          <a:blip r:embed="rId3"/>
           <a:stretch>
             <a:fillRect/>
           </a:stretch>
@@ -8987,7 +8520,7 @@
           <a:bodyPr wrap="square" lIns="0" tIns="0" rIns="0" bIns="0" rtlCol="0" anchor="t"/>
           <a:lstStyle/>
           <a:p>
-            <a:pPr algn="l" indent="0" marL="0">
+            <a:pPr marL="0" indent="0" algn="l">
               <a:lnSpc>
                 <a:spcPts val="1400"/>
               </a:lnSpc>
@@ -9004,12 +8537,6 @@
               </a:rPr>
               <a:t>Electronics dominates revenue at </a:t>
             </a:r>
-            <a:pPr algn="l" indent="0" marL="0">
-              <a:lnSpc>
-                <a:spcPts val="1400"/>
-              </a:lnSpc>
-              <a:buNone/>
-            </a:pPr>
             <a:r>
               <a:rPr lang="en-US" sz="900" b="1" dirty="0">
                 <a:solidFill>
@@ -9021,12 +8548,6 @@
               </a:rPr>
               <a:t>$486K</a:t>
             </a:r>
-            <a:pPr algn="l" indent="0" marL="0">
-              <a:lnSpc>
-                <a:spcPts val="1400"/>
-              </a:lnSpc>
-              <a:buNone/>
-            </a:pPr>
             <a:r>
               <a:rPr lang="en-US" sz="900" dirty="0">
                 <a:solidFill>
@@ -9063,7 +8584,7 @@
           <a:bodyPr wrap="none" lIns="0" tIns="0" rIns="0" bIns="0" rtlCol="0" anchor="t"/>
           <a:lstStyle/>
           <a:p>
-            <a:pPr algn="l" indent="0" marL="0">
+            <a:pPr marL="0" indent="0" algn="l">
               <a:lnSpc>
                 <a:spcPts val="1500"/>
               </a:lnSpc>
@@ -9086,14 +8607,14 @@
       </p:sp>
       <p:pic>
         <p:nvPicPr>
-          <p:cNvPr id="8" name="Image 1" descr="preencoded.png">    </p:cNvPr>
+          <p:cNvPr id="8" name="Image 1" descr="preencoded.png"/>
           <p:cNvPicPr>
             <a:picLocks noChangeAspect="1"/>
           </p:cNvPicPr>
           <p:nvPr/>
         </p:nvPicPr>
         <p:blipFill>
-          <a:blip r:embed="rId2"/>
+          <a:blip r:embed="rId4"/>
           <a:stretch>
             <a:fillRect/>
           </a:stretch>
@@ -9129,7 +8650,7 @@
           <a:bodyPr wrap="square" lIns="0" tIns="0" rIns="0" bIns="0" rtlCol="0" anchor="t"/>
           <a:lstStyle/>
           <a:p>
-            <a:pPr algn="l" indent="0" marL="0">
+            <a:pPr marL="0" indent="0" algn="l">
               <a:lnSpc>
                 <a:spcPts val="1400"/>
               </a:lnSpc>
@@ -9146,12 +8667,6 @@
               </a:rPr>
               <a:t>Discounts </a:t>
             </a:r>
-            <a:pPr algn="l" indent="0" marL="0">
-              <a:lnSpc>
-                <a:spcPts val="1400"/>
-              </a:lnSpc>
-              <a:buNone/>
-            </a:pPr>
             <a:r>
               <a:rPr lang="en-US" sz="900" b="1" dirty="0">
                 <a:solidFill>
@@ -9163,12 +8678,6 @@
               </a:rPr>
               <a:t>reduce total revenue</a:t>
             </a:r>
-            <a:pPr algn="l" indent="0" marL="0">
-              <a:lnSpc>
-                <a:spcPts val="1400"/>
-              </a:lnSpc>
-              <a:buNone/>
-            </a:pPr>
             <a:r>
               <a:rPr lang="en-US" sz="900" dirty="0">
                 <a:solidFill>
@@ -9180,12 +8689,6 @@
               </a:rPr>
               <a:t> but increase </a:t>
             </a:r>
-            <a:pPr algn="l" indent="0" marL="0">
-              <a:lnSpc>
-                <a:spcPts val="1400"/>
-              </a:lnSpc>
-              <a:buNone/>
-            </a:pPr>
             <a:r>
               <a:rPr lang="en-US" sz="900" b="1" dirty="0">
                 <a:solidFill>
@@ -9197,12 +8700,6 @@
               </a:rPr>
               <a:t>average order value</a:t>
             </a:r>
-            <a:pPr algn="l" indent="0" marL="0">
-              <a:lnSpc>
-                <a:spcPts val="1400"/>
-              </a:lnSpc>
-              <a:buNone/>
-            </a:pPr>
             <a:r>
               <a:rPr lang="en-US" sz="900" dirty="0">
                 <a:solidFill>
@@ -9264,7 +8761,7 @@
           <a:bodyPr wrap="none" lIns="0" tIns="0" rIns="0" bIns="0" rtlCol="0" anchor="t"/>
           <a:lstStyle/>
           <a:p>
-            <a:pPr algn="l" indent="0" marL="0">
+            <a:pPr marL="0" indent="0" algn="l">
               <a:lnSpc>
                 <a:spcPts val="2450"/>
               </a:lnSpc>
@@ -9306,7 +8803,7 @@
           <a:bodyPr wrap="square" lIns="0" tIns="0" rIns="0" bIns="0" rtlCol="0" anchor="t"/>
           <a:lstStyle/>
           <a:p>
-            <a:pPr algn="l" indent="0" marL="0">
+            <a:pPr marL="0" indent="0" algn="l">
               <a:lnSpc>
                 <a:spcPts val="1050"/>
               </a:lnSpc>
@@ -9348,7 +8845,7 @@
           <a:bodyPr wrap="none" lIns="0" tIns="0" rIns="0" bIns="0" rtlCol="0" anchor="t"/>
           <a:lstStyle/>
           <a:p>
-            <a:pPr algn="l" indent="0" marL="0">
+            <a:pPr marL="0" indent="0" algn="l">
               <a:lnSpc>
                 <a:spcPts val="1200"/>
               </a:lnSpc>
@@ -9371,14 +8868,14 @@
       </p:sp>
       <p:pic>
         <p:nvPicPr>
-          <p:cNvPr id="5" name="Image 0" descr="preencoded.png">    </p:cNvPr>
+          <p:cNvPr id="5" name="Image 0" descr="preencoded.png"/>
           <p:cNvPicPr>
             <a:picLocks noChangeAspect="1"/>
           </p:cNvPicPr>
           <p:nvPr/>
         </p:nvPicPr>
         <p:blipFill>
-          <a:blip r:embed="rId1"/>
+          <a:blip r:embed="rId3"/>
           <a:stretch>
             <a:fillRect/>
           </a:stretch>
@@ -9414,7 +8911,7 @@
           <a:bodyPr wrap="square" lIns="0" tIns="0" rIns="0" bIns="0" rtlCol="0" anchor="t"/>
           <a:lstStyle/>
           <a:p>
-            <a:pPr algn="l" indent="0" marL="0">
+            <a:pPr marL="0" indent="0" algn="l">
               <a:lnSpc>
                 <a:spcPts val="1050"/>
               </a:lnSpc>
@@ -9431,12 +8928,6 @@
               </a:rPr>
               <a:t>Loyal customers</a:t>
             </a:r>
-            <a:pPr algn="l" indent="0" marL="0">
-              <a:lnSpc>
-                <a:spcPts val="1050"/>
-              </a:lnSpc>
-              <a:buNone/>
-            </a:pPr>
             <a:r>
               <a:rPr lang="en-US" sz="700" dirty="0">
                 <a:solidFill>
@@ -9473,7 +8964,7 @@
           <a:bodyPr wrap="none" lIns="0" tIns="0" rIns="0" bIns="0" rtlCol="0" anchor="t"/>
           <a:lstStyle/>
           <a:p>
-            <a:pPr algn="l" indent="0" marL="0">
+            <a:pPr marL="0" indent="0" algn="l">
               <a:lnSpc>
                 <a:spcPts val="1200"/>
               </a:lnSpc>
@@ -9496,14 +8987,14 @@
       </p:sp>
       <p:pic>
         <p:nvPicPr>
-          <p:cNvPr id="8" name="Image 1" descr="preencoded.png">    </p:cNvPr>
+          <p:cNvPr id="8" name="Image 1" descr="preencoded.png"/>
           <p:cNvPicPr>
             <a:picLocks noChangeAspect="1"/>
           </p:cNvPicPr>
           <p:nvPr/>
         </p:nvPicPr>
         <p:blipFill>
-          <a:blip r:embed="rId2"/>
+          <a:blip r:embed="rId4"/>
           <a:stretch>
             <a:fillRect/>
           </a:stretch>
@@ -9539,7 +9030,7 @@
           <a:bodyPr wrap="square" lIns="0" tIns="0" rIns="0" bIns="0" rtlCol="0" anchor="t"/>
           <a:lstStyle/>
           <a:p>
-            <a:pPr algn="l" indent="0" marL="0">
+            <a:pPr marL="0" indent="0" algn="l">
               <a:lnSpc>
                 <a:spcPts val="1050"/>
               </a:lnSpc>
@@ -9556,12 +9047,6 @@
               </a:rPr>
               <a:t>Subscribers spend </a:t>
             </a:r>
-            <a:pPr algn="l" indent="0" marL="0">
-              <a:lnSpc>
-                <a:spcPts val="1050"/>
-              </a:lnSpc>
-              <a:buNone/>
-            </a:pPr>
             <a:r>
               <a:rPr lang="en-US" sz="700" b="1" dirty="0">
                 <a:solidFill>
@@ -9573,12 +9058,6 @@
               </a:rPr>
               <a:t>63% more per transaction</a:t>
             </a:r>
-            <a:pPr algn="l" indent="0" marL="0">
-              <a:lnSpc>
-                <a:spcPts val="1050"/>
-              </a:lnSpc>
-              <a:buNone/>
-            </a:pPr>
             <a:r>
               <a:rPr lang="en-US" sz="700" dirty="0">
                 <a:solidFill>
@@ -9615,7 +9094,7 @@
           <a:bodyPr wrap="none" lIns="0" tIns="0" rIns="0" bIns="0" rtlCol="0" anchor="t"/>
           <a:lstStyle/>
           <a:p>
-            <a:pPr algn="ctr" indent="0" marL="0">
+            <a:pPr marL="0" indent="0" algn="ctr">
               <a:lnSpc>
                 <a:spcPts val="2450"/>
               </a:lnSpc>
@@ -9657,7 +9136,7 @@
           <a:bodyPr wrap="none" lIns="0" tIns="0" rIns="0" bIns="0" rtlCol="0" anchor="t"/>
           <a:lstStyle/>
           <a:p>
-            <a:pPr algn="ctr" indent="0" marL="0">
+            <a:pPr marL="0" indent="0" algn="ctr">
               <a:lnSpc>
                 <a:spcPts val="1200"/>
               </a:lnSpc>
@@ -9699,7 +9178,7 @@
           <a:bodyPr wrap="none" lIns="0" tIns="0" rIns="0" bIns="0" rtlCol="0" anchor="t"/>
           <a:lstStyle/>
           <a:p>
-            <a:pPr algn="ctr" indent="0" marL="0">
+            <a:pPr marL="0" indent="0" algn="ctr">
               <a:lnSpc>
                 <a:spcPts val="1050"/>
               </a:lnSpc>
@@ -9741,7 +9220,7 @@
           <a:bodyPr wrap="none" lIns="0" tIns="0" rIns="0" bIns="0" rtlCol="0" anchor="t"/>
           <a:lstStyle/>
           <a:p>
-            <a:pPr algn="ctr" indent="0" marL="0">
+            <a:pPr marL="0" indent="0" algn="ctr">
               <a:lnSpc>
                 <a:spcPts val="2450"/>
               </a:lnSpc>
@@ -9783,7 +9262,7 @@
           <a:bodyPr wrap="none" lIns="0" tIns="0" rIns="0" bIns="0" rtlCol="0" anchor="t"/>
           <a:lstStyle/>
           <a:p>
-            <a:pPr algn="ctr" indent="0" marL="0">
+            <a:pPr marL="0" indent="0" algn="ctr">
               <a:lnSpc>
                 <a:spcPts val="1200"/>
               </a:lnSpc>
@@ -9825,7 +9304,7 @@
           <a:bodyPr wrap="none" lIns="0" tIns="0" rIns="0" bIns="0" rtlCol="0" anchor="t"/>
           <a:lstStyle/>
           <a:p>
-            <a:pPr algn="ctr" indent="0" marL="0">
+            <a:pPr marL="0" indent="0" algn="ctr">
               <a:lnSpc>
                 <a:spcPts val="1050"/>
               </a:lnSpc>
@@ -9867,7 +9346,7 @@
           <a:bodyPr wrap="none" lIns="0" tIns="0" rIns="0" bIns="0" rtlCol="0" anchor="t"/>
           <a:lstStyle/>
           <a:p>
-            <a:pPr algn="ctr" indent="0" marL="0">
+            <a:pPr marL="0" indent="0" algn="ctr">
               <a:lnSpc>
                 <a:spcPts val="2450"/>
               </a:lnSpc>
@@ -9909,7 +9388,7 @@
           <a:bodyPr wrap="none" lIns="0" tIns="0" rIns="0" bIns="0" rtlCol="0" anchor="t"/>
           <a:lstStyle/>
           <a:p>
-            <a:pPr algn="ctr" indent="0" marL="0">
+            <a:pPr marL="0" indent="0" algn="ctr">
               <a:lnSpc>
                 <a:spcPts val="1200"/>
               </a:lnSpc>
@@ -9951,7 +9430,7 @@
           <a:bodyPr wrap="none" lIns="0" tIns="0" rIns="0" bIns="0" rtlCol="0" anchor="t"/>
           <a:lstStyle/>
           <a:p>
-            <a:pPr algn="ctr" indent="0" marL="0">
+            <a:pPr marL="0" indent="0" algn="ctr">
               <a:lnSpc>
                 <a:spcPts val="1050"/>
               </a:lnSpc>
@@ -10018,7 +9497,7 @@
           <a:bodyPr wrap="none" lIns="0" tIns="0" rIns="0" bIns="0" rtlCol="0" anchor="t"/>
           <a:lstStyle/>
           <a:p>
-            <a:pPr algn="l" indent="0" marL="0">
+            <a:pPr marL="0" indent="0" algn="l">
               <a:lnSpc>
                 <a:spcPts val="2950"/>
               </a:lnSpc>
@@ -10060,7 +9539,7 @@
           <a:bodyPr wrap="square" lIns="0" tIns="0" rIns="0" bIns="0" rtlCol="0" anchor="t"/>
           <a:lstStyle/>
           <a:p>
-            <a:pPr algn="l" indent="0" marL="0">
+            <a:pPr marL="0" indent="0" algn="l">
               <a:lnSpc>
                 <a:spcPts val="1350"/>
               </a:lnSpc>
@@ -10081,54 +9560,6 @@
           </a:p>
         </p:txBody>
       </p:sp>
-      <p:pic>
-        <p:nvPicPr>
-          <p:cNvPr id="4" name="Image 0" descr="preencoded.png">    </p:cNvPr>
-          <p:cNvPicPr>
-            <a:picLocks noChangeAspect="1"/>
-          </p:cNvPicPr>
-          <p:nvPr/>
-        </p:nvPicPr>
-        <p:blipFill>
-          <a:blip r:embed="rId1"/>
-          <a:stretch>
-            <a:fillRect/>
-          </a:stretch>
-        </p:blipFill>
-        <p:spPr>
-          <a:xfrm>
-            <a:off x="3154040" y="1549078"/>
-            <a:ext cx="1372195" cy="1372195"/>
-          </a:xfrm>
-          <a:prstGeom prst="rect">
-            <a:avLst/>
-          </a:prstGeom>
-        </p:spPr>
-      </p:pic>
-      <p:pic>
-        <p:nvPicPr>
-          <p:cNvPr id="5" name="Image 1" descr="preencoded.png">    </p:cNvPr>
-          <p:cNvPicPr>
-            <a:picLocks noChangeAspect="1"/>
-          </p:cNvPicPr>
-          <p:nvPr/>
-        </p:nvPicPr>
-        <p:blipFill>
-          <a:blip r:embed="rId2"/>
-          <a:stretch>
-            <a:fillRect/>
-          </a:stretch>
-        </p:blipFill>
-        <p:spPr>
-          <a:xfrm>
-            <a:off x="4617690" y="1549078"/>
-            <a:ext cx="1372195" cy="1372195"/>
-          </a:xfrm>
-          <a:prstGeom prst="rect">
-            <a:avLst/>
-          </a:prstGeom>
-        </p:spPr>
-      </p:pic>
       <p:sp>
         <p:nvSpPr>
           <p:cNvPr id="6" name="Shape 2"/>
@@ -10177,7 +9608,7 @@
           <a:bodyPr wrap="none" lIns="0" tIns="0" rIns="0" bIns="0" rtlCol="0" anchor="t"/>
           <a:lstStyle/>
           <a:p>
-            <a:pPr algn="l" indent="0" marL="0">
+            <a:pPr marL="0" indent="0" algn="l">
               <a:lnSpc>
                 <a:spcPts val="1450"/>
               </a:lnSpc>
@@ -10219,7 +9650,7 @@
           <a:bodyPr wrap="none" lIns="0" tIns="0" rIns="0" bIns="0" rtlCol="0" anchor="t"/>
           <a:lstStyle/>
           <a:p>
-            <a:pPr algn="l" indent="0" marL="0">
+            <a:pPr marL="0" indent="0" algn="l">
               <a:lnSpc>
                 <a:spcPts val="1350"/>
               </a:lnSpc>
@@ -10236,12 +9667,6 @@
               </a:rPr>
               <a:t>Other: </a:t>
             </a:r>
-            <a:pPr algn="l" indent="0" marL="0">
-              <a:lnSpc>
-                <a:spcPts val="1350"/>
-              </a:lnSpc>
-              <a:buNone/>
-            </a:pPr>
             <a:r>
               <a:rPr lang="en-US" sz="900" b="1" dirty="0">
                 <a:solidFill>
@@ -10253,12 +9678,6 @@
               </a:rPr>
               <a:t>$391K (39.3%)</a:t>
             </a:r>
-            <a:pPr algn="l" indent="0" marL="0">
-              <a:lnSpc>
-                <a:spcPts val="1350"/>
-              </a:lnSpc>
-              <a:buNone/>
-            </a:pPr>
             <a:r>
               <a:rPr lang="en-US" sz="900" dirty="0">
                 <a:solidFill>
@@ -10322,7 +9741,7 @@
           <a:bodyPr wrap="none" lIns="0" tIns="0" rIns="0" bIns="0" rtlCol="0" anchor="t"/>
           <a:lstStyle/>
           <a:p>
-            <a:pPr algn="l" indent="0" marL="0">
+            <a:pPr marL="0" indent="0" algn="l">
               <a:lnSpc>
                 <a:spcPts val="1450"/>
               </a:lnSpc>
@@ -10364,7 +9783,7 @@
           <a:bodyPr wrap="none" lIns="0" tIns="0" rIns="0" bIns="0" rtlCol="0" anchor="t"/>
           <a:lstStyle/>
           <a:p>
-            <a:pPr algn="l" indent="0" marL="0">
+            <a:pPr marL="0" indent="0" algn="l">
               <a:lnSpc>
                 <a:spcPts val="1350"/>
               </a:lnSpc>
@@ -10381,12 +9800,6 @@
               </a:rPr>
               <a:t>51+: </a:t>
             </a:r>
-            <a:pPr algn="l" indent="0" marL="0">
-              <a:lnSpc>
-                <a:spcPts val="1350"/>
-              </a:lnSpc>
-              <a:buNone/>
-            </a:pPr>
             <a:r>
               <a:rPr lang="en-US" sz="900" b="1" dirty="0">
                 <a:solidFill>
@@ -10398,12 +9811,6 @@
               </a:rPr>
               <a:t>$399K (40.2%)</a:t>
             </a:r>
-            <a:pPr algn="l" indent="0" marL="0">
-              <a:lnSpc>
-                <a:spcPts val="1350"/>
-              </a:lnSpc>
-              <a:buNone/>
-            </a:pPr>
             <a:r>
               <a:rPr lang="en-US" sz="900" dirty="0">
                 <a:solidFill>
@@ -10467,7 +9874,7 @@
           <a:bodyPr wrap="none" lIns="0" tIns="0" rIns="0" bIns="0" rtlCol="0" anchor="t"/>
           <a:lstStyle/>
           <a:p>
-            <a:pPr algn="l" indent="0" marL="0">
+            <a:pPr marL="0" indent="0" algn="l">
               <a:lnSpc>
                 <a:spcPts val="1450"/>
               </a:lnSpc>
@@ -10509,7 +9916,7 @@
           <a:bodyPr wrap="square" lIns="0" tIns="0" rIns="0" bIns="0" rtlCol="0" anchor="t"/>
           <a:lstStyle/>
           <a:p>
-            <a:pPr algn="l" indent="0" marL="0">
+            <a:pPr marL="0" indent="0" algn="l">
               <a:lnSpc>
                 <a:spcPts val="1350"/>
               </a:lnSpc>
@@ -10526,12 +9933,6 @@
               </a:rPr>
               <a:t>Headphones: </a:t>
             </a:r>
-            <a:pPr algn="l" indent="0" marL="0">
-              <a:lnSpc>
-                <a:spcPts val="1350"/>
-              </a:lnSpc>
-              <a:buNone/>
-            </a:pPr>
             <a:r>
               <a:rPr lang="en-US" sz="900" b="1" dirty="0">
                 <a:solidFill>
@@ -10543,12 +9944,6 @@
               </a:rPr>
               <a:t>$138.9K</a:t>
             </a:r>
-            <a:pPr algn="l" indent="0" marL="0">
-              <a:lnSpc>
-                <a:spcPts val="1350"/>
-              </a:lnSpc>
-              <a:buNone/>
-            </a:pPr>
             <a:r>
               <a:rPr lang="en-US" sz="900" dirty="0">
                 <a:solidFill>
@@ -10612,7 +10007,7 @@
           <a:bodyPr wrap="none" lIns="0" tIns="0" rIns="0" bIns="0" rtlCol="0" anchor="t"/>
           <a:lstStyle/>
           <a:p>
-            <a:pPr algn="l" indent="0" marL="0">
+            <a:pPr marL="0" indent="0" algn="l">
               <a:lnSpc>
                 <a:spcPts val="1450"/>
               </a:lnSpc>
@@ -10654,7 +10049,7 @@
           <a:bodyPr wrap="none" lIns="0" tIns="0" rIns="0" bIns="0" rtlCol="0" anchor="t"/>
           <a:lstStyle/>
           <a:p>
-            <a:pPr algn="l" indent="0" marL="0">
+            <a:pPr marL="0" indent="0" algn="l">
               <a:lnSpc>
                 <a:spcPts val="1350"/>
               </a:lnSpc>
@@ -10671,12 +10066,6 @@
               </a:rPr>
               <a:t>Debit Card: </a:t>
             </a:r>
-            <a:pPr algn="l" indent="0" marL="0">
-              <a:lnSpc>
-                <a:spcPts val="1350"/>
-              </a:lnSpc>
-              <a:buNone/>
-            </a:pPr>
             <a:r>
               <a:rPr lang="en-US" sz="900" b="1" dirty="0">
                 <a:solidFill>
@@ -10688,12 +10077,6 @@
               </a:rPr>
               <a:t>25.5%</a:t>
             </a:r>
-            <a:pPr algn="l" indent="0" marL="0">
-              <a:lnSpc>
-                <a:spcPts val="1350"/>
-              </a:lnSpc>
-              <a:buNone/>
-            </a:pPr>
             <a:r>
               <a:rPr lang="en-US" sz="900" dirty="0">
                 <a:solidFill>
@@ -10709,6 +10092,66 @@
           </a:p>
         </p:txBody>
       </p:sp>
+      <p:pic>
+        <p:nvPicPr>
+          <p:cNvPr id="29" name="Picture 28">
+            <a:extLst>
+              <a:ext uri="{FF2B5EF4-FFF2-40B4-BE49-F238E27FC236}">
+                <a16:creationId xmlns:a16="http://schemas.microsoft.com/office/drawing/2014/main" id="{60DBE57A-6E56-CD5D-E8AC-34E8E3AA2239}"/>
+              </a:ext>
+            </a:extLst>
+          </p:cNvPr>
+          <p:cNvPicPr>
+            <a:picLocks noChangeAspect="1"/>
+          </p:cNvPicPr>
+          <p:nvPr/>
+        </p:nvPicPr>
+        <p:blipFill>
+          <a:blip r:embed="rId3"/>
+          <a:stretch>
+            <a:fillRect/>
+          </a:stretch>
+        </p:blipFill>
+        <p:spPr>
+          <a:xfrm>
+            <a:off x="914510" y="1419225"/>
+            <a:ext cx="2876733" cy="1560217"/>
+          </a:xfrm>
+          <a:prstGeom prst="rect">
+            <a:avLst/>
+          </a:prstGeom>
+        </p:spPr>
+      </p:pic>
+      <p:pic>
+        <p:nvPicPr>
+          <p:cNvPr id="31" name="Picture 30">
+            <a:extLst>
+              <a:ext uri="{FF2B5EF4-FFF2-40B4-BE49-F238E27FC236}">
+                <a16:creationId xmlns:a16="http://schemas.microsoft.com/office/drawing/2014/main" id="{9FF62B57-794E-1807-1FC0-FDDD6560E8DB}"/>
+              </a:ext>
+            </a:extLst>
+          </p:cNvPr>
+          <p:cNvPicPr>
+            <a:picLocks noChangeAspect="1"/>
+          </p:cNvPicPr>
+          <p:nvPr/>
+        </p:nvPicPr>
+        <p:blipFill>
+          <a:blip r:embed="rId4"/>
+          <a:stretch>
+            <a:fillRect/>
+          </a:stretch>
+        </p:blipFill>
+        <p:spPr>
+          <a:xfrm>
+            <a:off x="4572000" y="1391054"/>
+            <a:ext cx="2876733" cy="1569127"/>
+          </a:xfrm>
+          <a:prstGeom prst="rect">
+            <a:avLst/>
+          </a:prstGeom>
+        </p:spPr>
+      </p:pic>
     </p:spTree>
   </p:cSld>
   <p:clrMapOvr>
@@ -11010,4 +10453,299 @@
     </a:ext>
   </a:extLst>
 </a:theme>
+</file>
+
+<file path=ppt/theme/theme2.xml><?xml version="1.0" encoding="utf-8"?>
+<a:theme xmlns:a="http://schemas.openxmlformats.org/drawingml/2006/main" name="Office Theme">
+  <a:themeElements>
+    <a:clrScheme name="Office">
+      <a:dk1>
+        <a:sysClr val="windowText" lastClr="000000"/>
+      </a:dk1>
+      <a:lt1>
+        <a:sysClr val="window" lastClr="FFFFFF"/>
+      </a:lt1>
+      <a:dk2>
+        <a:srgbClr val="44546A"/>
+      </a:dk2>
+      <a:lt2>
+        <a:srgbClr val="E7E6E6"/>
+      </a:lt2>
+      <a:accent1>
+        <a:srgbClr val="4472C4"/>
+      </a:accent1>
+      <a:accent2>
+        <a:srgbClr val="ED7D31"/>
+      </a:accent2>
+      <a:accent3>
+        <a:srgbClr val="A5A5A5"/>
+      </a:accent3>
+      <a:accent4>
+        <a:srgbClr val="FFC000"/>
+      </a:accent4>
+      <a:accent5>
+        <a:srgbClr val="5B9BD5"/>
+      </a:accent5>
+      <a:accent6>
+        <a:srgbClr val="70AD47"/>
+      </a:accent6>
+      <a:hlink>
+        <a:srgbClr val="0563C1"/>
+      </a:hlink>
+      <a:folHlink>
+        <a:srgbClr val="954F72"/>
+      </a:folHlink>
+    </a:clrScheme>
+    <a:fontScheme name="Office">
+      <a:majorFont>
+        <a:latin typeface="Calibri Light" panose="020F0302020204030204"/>
+        <a:ea typeface=""/>
+        <a:cs typeface=""/>
+        <a:font script="Jpan" typeface="游ゴシック Light"/>
+        <a:font script="Hang" typeface="맑은 고딕"/>
+        <a:font script="Hans" typeface="等线 Light"/>
+        <a:font script="Hant" typeface="新細明體"/>
+        <a:font script="Arab" typeface="Times New Roman"/>
+        <a:font script="Hebr" typeface="Times New Roman"/>
+        <a:font script="Thai" typeface="Angsana New"/>
+        <a:font script="Ethi" typeface="Nyala"/>
+        <a:font script="Beng" typeface="Vrinda"/>
+        <a:font script="Gujr" typeface="Shruti"/>
+        <a:font script="Khmr" typeface="MoolBoran"/>
+        <a:font script="Knda" typeface="Tunga"/>
+        <a:font script="Guru" typeface="Raavi"/>
+        <a:font script="Cans" typeface="Euphemia"/>
+        <a:font script="Cher" typeface="Plantagenet Cherokee"/>
+        <a:font script="Yiii" typeface="Microsoft Yi Baiti"/>
+        <a:font script="Tibt" typeface="Microsoft Himalaya"/>
+        <a:font script="Thaa" typeface="MV Boli"/>
+        <a:font script="Deva" typeface="Mangal"/>
+        <a:font script="Telu" typeface="Gautami"/>
+        <a:font script="Taml" typeface="Latha"/>
+        <a:font script="Syrc" typeface="Estrangelo Edessa"/>
+        <a:font script="Orya" typeface="Kalinga"/>
+        <a:font script="Mlym" typeface="Kartika"/>
+        <a:font script="Laoo" typeface="DokChampa"/>
+        <a:font script="Sinh" typeface="Iskoola Pota"/>
+        <a:font script="Mong" typeface="Mongolian Baiti"/>
+        <a:font script="Viet" typeface="Times New Roman"/>
+        <a:font script="Uigh" typeface="Microsoft Uighur"/>
+        <a:font script="Geor" typeface="Sylfaen"/>
+        <a:font script="Armn" typeface="Arial"/>
+        <a:font script="Bugi" typeface="Leelawadee UI"/>
+        <a:font script="Bopo" typeface="Microsoft JhengHei"/>
+        <a:font script="Java" typeface="Javanese Text"/>
+        <a:font script="Lisu" typeface="Segoe UI"/>
+        <a:font script="Mymr" typeface="Myanmar Text"/>
+        <a:font script="Nkoo" typeface="Ebrima"/>
+        <a:font script="Olck" typeface="Nirmala UI"/>
+        <a:font script="Osma" typeface="Ebrima"/>
+        <a:font script="Phag" typeface="Phagspa"/>
+        <a:font script="Syrn" typeface="Estrangelo Edessa"/>
+        <a:font script="Syrj" typeface="Estrangelo Edessa"/>
+        <a:font script="Syre" typeface="Estrangelo Edessa"/>
+        <a:font script="Sora" typeface="Nirmala UI"/>
+        <a:font script="Tale" typeface="Microsoft Tai Le"/>
+        <a:font script="Talu" typeface="Microsoft New Tai Lue"/>
+        <a:font script="Tfng" typeface="Ebrima"/>
+      </a:majorFont>
+      <a:minorFont>
+        <a:latin typeface="Calibri" panose="020F0502020204030204"/>
+        <a:ea typeface=""/>
+        <a:cs typeface=""/>
+        <a:font script="Jpan" typeface="游ゴシック"/>
+        <a:font script="Hang" typeface="맑은 고딕"/>
+        <a:font script="Hans" typeface="等线"/>
+        <a:font script="Hant" typeface="新細明體"/>
+        <a:font script="Arab" typeface="Arial"/>
+        <a:font script="Hebr" typeface="Arial"/>
+        <a:font script="Thai" typeface="Cordia New"/>
+        <a:font script="Ethi" typeface="Nyala"/>
+        <a:font script="Beng" typeface="Vrinda"/>
+        <a:font script="Gujr" typeface="Shruti"/>
+        <a:font script="Khmr" typeface="DaunPenh"/>
+        <a:font script="Knda" typeface="Tunga"/>
+        <a:font script="Guru" typeface="Raavi"/>
+        <a:font script="Cans" typeface="Euphemia"/>
+        <a:font script="Cher" typeface="Plantagenet Cherokee"/>
+        <a:font script="Yiii" typeface="Microsoft Yi Baiti"/>
+        <a:font script="Tibt" typeface="Microsoft Himalaya"/>
+        <a:font script="Thaa" typeface="MV Boli"/>
+        <a:font script="Deva" typeface="Mangal"/>
+        <a:font script="Telu" typeface="Gautami"/>
+        <a:font script="Taml" typeface="Latha"/>
+        <a:font script="Syrc" typeface="Estrangelo Edessa"/>
+        <a:font script="Orya" typeface="Kalinga"/>
+        <a:font script="Mlym" typeface="Kartika"/>
+        <a:font script="Laoo" typeface="DokChampa"/>
+        <a:font script="Sinh" typeface="Iskoola Pota"/>
+        <a:font script="Mong" typeface="Mongolian Baiti"/>
+        <a:font script="Viet" typeface="Arial"/>
+        <a:font script="Uigh" typeface="Microsoft Uighur"/>
+        <a:font script="Geor" typeface="Sylfaen"/>
+        <a:font script="Armn" typeface="Arial"/>
+        <a:font script="Bugi" typeface="Leelawadee UI"/>
+        <a:font script="Bopo" typeface="Microsoft JhengHei"/>
+        <a:font script="Java" typeface="Javanese Text"/>
+        <a:font script="Lisu" typeface="Segoe UI"/>
+        <a:font script="Mymr" typeface="Myanmar Text"/>
+        <a:font script="Nkoo" typeface="Ebrima"/>
+        <a:font script="Olck" typeface="Nirmala UI"/>
+        <a:font script="Osma" typeface="Ebrima"/>
+        <a:font script="Phag" typeface="Phagspa"/>
+        <a:font script="Syrn" typeface="Estrangelo Edessa"/>
+        <a:font script="Syrj" typeface="Estrangelo Edessa"/>
+        <a:font script="Syre" typeface="Estrangelo Edessa"/>
+        <a:font script="Sora" typeface="Nirmala UI"/>
+        <a:font script="Tale" typeface="Microsoft Tai Le"/>
+        <a:font script="Talu" typeface="Microsoft New Tai Lue"/>
+        <a:font script="Tfng" typeface="Ebrima"/>
+      </a:minorFont>
+    </a:fontScheme>
+    <a:fmtScheme name="Office">
+      <a:fillStyleLst>
+        <a:solidFill>
+          <a:schemeClr val="phClr"/>
+        </a:solidFill>
+        <a:gradFill rotWithShape="1">
+          <a:gsLst>
+            <a:gs pos="0">
+              <a:schemeClr val="phClr">
+                <a:lumMod val="110000"/>
+                <a:satMod val="105000"/>
+                <a:tint val="67000"/>
+              </a:schemeClr>
+            </a:gs>
+            <a:gs pos="50000">
+              <a:schemeClr val="phClr">
+                <a:lumMod val="105000"/>
+                <a:satMod val="103000"/>
+                <a:tint val="73000"/>
+              </a:schemeClr>
+            </a:gs>
+            <a:gs pos="100000">
+              <a:schemeClr val="phClr">
+                <a:lumMod val="105000"/>
+                <a:satMod val="109000"/>
+                <a:tint val="81000"/>
+              </a:schemeClr>
+            </a:gs>
+          </a:gsLst>
+          <a:lin ang="5400000" scaled="0"/>
+        </a:gradFill>
+        <a:gradFill rotWithShape="1">
+          <a:gsLst>
+            <a:gs pos="0">
+              <a:schemeClr val="phClr">
+                <a:satMod val="103000"/>
+                <a:lumMod val="102000"/>
+                <a:tint val="94000"/>
+              </a:schemeClr>
+            </a:gs>
+            <a:gs pos="50000">
+              <a:schemeClr val="phClr">
+                <a:satMod val="110000"/>
+                <a:lumMod val="100000"/>
+                <a:shade val="100000"/>
+              </a:schemeClr>
+            </a:gs>
+            <a:gs pos="100000">
+              <a:schemeClr val="phClr">
+                <a:lumMod val="99000"/>
+                <a:satMod val="120000"/>
+                <a:shade val="78000"/>
+              </a:schemeClr>
+            </a:gs>
+          </a:gsLst>
+          <a:lin ang="5400000" scaled="0"/>
+        </a:gradFill>
+      </a:fillStyleLst>
+      <a:lnStyleLst>
+        <a:ln w="6350" cap="flat" cmpd="sng" algn="ctr">
+          <a:solidFill>
+            <a:schemeClr val="phClr"/>
+          </a:solidFill>
+          <a:prstDash val="solid"/>
+          <a:miter lim="800000"/>
+        </a:ln>
+        <a:ln w="12700" cap="flat" cmpd="sng" algn="ctr">
+          <a:solidFill>
+            <a:schemeClr val="phClr"/>
+          </a:solidFill>
+          <a:prstDash val="solid"/>
+          <a:miter lim="800000"/>
+        </a:ln>
+        <a:ln w="19050" cap="flat" cmpd="sng" algn="ctr">
+          <a:solidFill>
+            <a:schemeClr val="phClr"/>
+          </a:solidFill>
+          <a:prstDash val="solid"/>
+          <a:miter lim="800000"/>
+        </a:ln>
+      </a:lnStyleLst>
+      <a:effectStyleLst>
+        <a:effectStyle>
+          <a:effectLst/>
+        </a:effectStyle>
+        <a:effectStyle>
+          <a:effectLst/>
+        </a:effectStyle>
+        <a:effectStyle>
+          <a:effectLst>
+            <a:outerShdw blurRad="57150" dist="19050" dir="5400000" algn="ctr" rotWithShape="0">
+              <a:srgbClr val="000000">
+                <a:alpha val="63000"/>
+              </a:srgbClr>
+            </a:outerShdw>
+          </a:effectLst>
+        </a:effectStyle>
+      </a:effectStyleLst>
+      <a:bgFillStyleLst>
+        <a:solidFill>
+          <a:schemeClr val="phClr"/>
+        </a:solidFill>
+        <a:solidFill>
+          <a:schemeClr val="phClr">
+            <a:tint val="95000"/>
+            <a:satMod val="170000"/>
+          </a:schemeClr>
+        </a:solidFill>
+        <a:gradFill rotWithShape="1">
+          <a:gsLst>
+            <a:gs pos="0">
+              <a:schemeClr val="phClr">
+                <a:tint val="93000"/>
+                <a:satMod val="150000"/>
+                <a:shade val="98000"/>
+                <a:lumMod val="102000"/>
+              </a:schemeClr>
+            </a:gs>
+            <a:gs pos="50000">
+              <a:schemeClr val="phClr">
+                <a:tint val="98000"/>
+                <a:satMod val="130000"/>
+                <a:shade val="90000"/>
+                <a:lumMod val="103000"/>
+              </a:schemeClr>
+            </a:gs>
+            <a:gs pos="100000">
+              <a:schemeClr val="phClr">
+                <a:shade val="63000"/>
+                <a:satMod val="120000"/>
+              </a:schemeClr>
+            </a:gs>
+          </a:gsLst>
+          <a:lin ang="5400000" scaled="0"/>
+        </a:gradFill>
+      </a:bgFillStyleLst>
+    </a:fmtScheme>
+  </a:themeElements>
+  <a:objectDefaults/>
+  <a:extraClrSchemeLst/>
+  <a:extLst>
+    <a:ext uri="{05A4C25C-085E-4340-85A3-A5531E510DB2}">
+      <thm15:themeFamily xmlns:thm15="http://schemas.microsoft.com/office/thememl/2012/main" name="Office Theme" id="{62F939B6-93AF-4DB8-9C6B-D6C7DFDC589F}" vid="{4A3C46E8-61CC-4603-A589-7422A47A8E4A}"/>
+    </a:ext>
+  </a:extLst>
+</a:theme>
 </file>